--- a/documents/презентация.pptx
+++ b/documents/презентация.pptx
@@ -5,7 +5,7 @@
     <p:sldMasterId id="2147483648" r:id="rId1"/>
   </p:sldMasterIdLst>
   <p:notesMasterIdLst>
-    <p:notesMasterId r:id="rId14"/>
+    <p:notesMasterId r:id="rId16"/>
   </p:notesMasterIdLst>
   <p:sldIdLst>
     <p:sldId id="256" r:id="rId2"/>
@@ -14,12 +14,14 @@
     <p:sldId id="259" r:id="rId5"/>
     <p:sldId id="260" r:id="rId6"/>
     <p:sldId id="261" r:id="rId7"/>
-    <p:sldId id="262" r:id="rId8"/>
-    <p:sldId id="263" r:id="rId9"/>
-    <p:sldId id="265" r:id="rId10"/>
-    <p:sldId id="266" r:id="rId11"/>
-    <p:sldId id="269" r:id="rId12"/>
-    <p:sldId id="268" r:id="rId13"/>
+    <p:sldId id="271" r:id="rId8"/>
+    <p:sldId id="270" r:id="rId9"/>
+    <p:sldId id="272" r:id="rId10"/>
+    <p:sldId id="265" r:id="rId11"/>
+    <p:sldId id="274" r:id="rId12"/>
+    <p:sldId id="275" r:id="rId13"/>
+    <p:sldId id="268" r:id="rId14"/>
+    <p:sldId id="276" r:id="rId15"/>
   </p:sldIdLst>
   <p:sldSz cx="12192000" cy="6858000"/>
   <p:notesSz cx="6858000" cy="9144000"/>
@@ -225,7 +227,7 @@
             </a:pPr>
             <a:fld id="{3632E96E-41F7-40C5-8419-297958CC00FA}" type="datetimeFigureOut">
               <a:rPr lang="ru-RU"/>
-              <a:t>06.06.2026</a:t>
+              <a:t>10.06.2026</a:t>
             </a:fld>
             <a:endParaRPr lang="ru-RU"/>
           </a:p>
@@ -672,7 +674,7 @@
             <a:pPr>
               <a:defRPr/>
             </a:pPr>
-            <a:fld id="{FD841082-2F8E-8296-AE50-D0A6BB021B5E}" type="slidenum">
+            <a:fld id="{BAD9BF7D-0478-54D7-062A-A9C38DB7D478}" type="slidenum">
               <a:rPr/>
               <a:t>10</a:t>
             </a:fld>
@@ -696,7 +698,7 @@
         <p:cNvPr id="1" name="">
           <a:extLst>
             <a:ext uri="{FF2B5EF4-FFF2-40B4-BE49-F238E27FC236}">
-              <a16:creationId xmlns:a16="http://schemas.microsoft.com/office/drawing/2014/main" id="{4546B538-0787-ABEF-BDED-88432D0BCEFA}"/>
+              <a16:creationId xmlns:a16="http://schemas.microsoft.com/office/drawing/2014/main" id="{7BFE2F35-20C9-B8CF-D555-1CCD9D7A2990}"/>
             </a:ext>
           </a:extLst>
         </p:cNvPr>
@@ -716,7 +718,7 @@
           <p:cNvPr id="2" name="Slide Image Placeholder 1">
             <a:extLst>
               <a:ext uri="{FF2B5EF4-FFF2-40B4-BE49-F238E27FC236}">
-                <a16:creationId xmlns:a16="http://schemas.microsoft.com/office/drawing/2014/main" id="{A86483BB-598E-186C-CBA1-8CBBB7E50B88}"/>
+                <a16:creationId xmlns:a16="http://schemas.microsoft.com/office/drawing/2014/main" id="{FDEC08B1-C59B-9345-B86F-F4FCF8E23CF0}"/>
               </a:ext>
             </a:extLst>
           </p:cNvPr>
@@ -734,7 +736,7 @@
           <p:cNvPr id="3" name="Notes Placeholder 2">
             <a:extLst>
               <a:ext uri="{FF2B5EF4-FFF2-40B4-BE49-F238E27FC236}">
-                <a16:creationId xmlns:a16="http://schemas.microsoft.com/office/drawing/2014/main" id="{C9465B42-D4ED-41D8-6E2C-0C794E41B760}"/>
+                <a16:creationId xmlns:a16="http://schemas.microsoft.com/office/drawing/2014/main" id="{EC93CE97-5DFB-133B-1FD8-BF029776A94E}"/>
               </a:ext>
             </a:extLst>
           </p:cNvPr>
@@ -762,7 +764,7 @@
           <p:cNvPr id="4" name="Slide Number Placeholder 3">
             <a:extLst>
               <a:ext uri="{FF2B5EF4-FFF2-40B4-BE49-F238E27FC236}">
-                <a16:creationId xmlns:a16="http://schemas.microsoft.com/office/drawing/2014/main" id="{166A26AC-CA87-529F-4C93-EBD4708360E1}"/>
+                <a16:creationId xmlns:a16="http://schemas.microsoft.com/office/drawing/2014/main" id="{13F8A4CC-9AC8-EB35-AFD9-62E5EF23E87D}"/>
               </a:ext>
             </a:extLst>
           </p:cNvPr>
@@ -781,7 +783,7 @@
             <a:pPr>
               <a:defRPr/>
             </a:pPr>
-            <a:fld id="{FD841082-2F8E-8296-AE50-D0A6BB021B5E}" type="slidenum">
+            <a:fld id="{BAD9BF7D-0478-54D7-062A-A9C38DB7D478}" type="slidenum">
               <a:rPr/>
               <a:t>11</a:t>
             </a:fld>
@@ -792,7 +794,7 @@
     </p:spTree>
     <p:extLst>
       <p:ext uri="{BB962C8B-B14F-4D97-AF65-F5344CB8AC3E}">
-        <p14:creationId xmlns:p14="http://schemas.microsoft.com/office/powerpoint/2010/main" val="3040455000"/>
+        <p14:creationId xmlns:p14="http://schemas.microsoft.com/office/powerpoint/2010/main" val="4278482571"/>
       </p:ext>
     </p:extLst>
   </p:cSld>
@@ -803,6 +805,120 @@
 </file>
 
 <file path=ppt/notesSlides/notesSlide12.xml><?xml version="1.0" encoding="utf-8"?>
+<p:notes xmlns:a="http://schemas.openxmlformats.org/drawingml/2006/main" xmlns:r="http://schemas.openxmlformats.org/officeDocument/2006/relationships" xmlns:p="http://schemas.openxmlformats.org/presentationml/2006/main">
+  <p:cSld>
+    <p:spTree>
+      <p:nvGrpSpPr>
+        <p:cNvPr id="1" name="">
+          <a:extLst>
+            <a:ext uri="{FF2B5EF4-FFF2-40B4-BE49-F238E27FC236}">
+              <a16:creationId xmlns:a16="http://schemas.microsoft.com/office/drawing/2014/main" id="{1EA38632-BD9D-FB85-1349-F5AA1C735989}"/>
+            </a:ext>
+          </a:extLst>
+        </p:cNvPr>
+        <p:cNvGrpSpPr/>
+        <p:nvPr/>
+      </p:nvGrpSpPr>
+      <p:grpSpPr bwMode="auto">
+        <a:xfrm>
+          <a:off x="0" y="0"/>
+          <a:ext cx="0" cy="0"/>
+          <a:chOff x="0" y="0"/>
+          <a:chExt cx="0" cy="0"/>
+        </a:xfrm>
+      </p:grpSpPr>
+      <p:sp>
+        <p:nvSpPr>
+          <p:cNvPr id="2" name="Slide Image Placeholder 1">
+            <a:extLst>
+              <a:ext uri="{FF2B5EF4-FFF2-40B4-BE49-F238E27FC236}">
+                <a16:creationId xmlns:a16="http://schemas.microsoft.com/office/drawing/2014/main" id="{547959D9-2729-DC6A-4BE4-0E2E34B079D1}"/>
+              </a:ext>
+            </a:extLst>
+          </p:cNvPr>
+          <p:cNvSpPr>
+            <a:spLocks noGrp="1" noRot="1" noChangeAspect="1"/>
+          </p:cNvSpPr>
+          <p:nvPr>
+            <p:ph type="sldImg"/>
+          </p:nvPr>
+        </p:nvSpPr>
+        <p:spPr bwMode="auto"/>
+      </p:sp>
+      <p:sp>
+        <p:nvSpPr>
+          <p:cNvPr id="3" name="Notes Placeholder 2">
+            <a:extLst>
+              <a:ext uri="{FF2B5EF4-FFF2-40B4-BE49-F238E27FC236}">
+                <a16:creationId xmlns:a16="http://schemas.microsoft.com/office/drawing/2014/main" id="{7081E2AB-61D7-6E2C-86DB-45F799C50159}"/>
+              </a:ext>
+            </a:extLst>
+          </p:cNvPr>
+          <p:cNvSpPr>
+            <a:spLocks noGrp="1"/>
+          </p:cNvSpPr>
+          <p:nvPr>
+            <p:ph type="body" idx="1"/>
+          </p:nvPr>
+        </p:nvSpPr>
+        <p:spPr bwMode="auto"/>
+        <p:txBody>
+          <a:bodyPr/>
+          <a:lstStyle/>
+          <a:p>
+            <a:pPr>
+              <a:defRPr/>
+            </a:pPr>
+            <a:endParaRPr/>
+          </a:p>
+        </p:txBody>
+      </p:sp>
+      <p:sp>
+        <p:nvSpPr>
+          <p:cNvPr id="4" name="Slide Number Placeholder 3">
+            <a:extLst>
+              <a:ext uri="{FF2B5EF4-FFF2-40B4-BE49-F238E27FC236}">
+                <a16:creationId xmlns:a16="http://schemas.microsoft.com/office/drawing/2014/main" id="{D7704EBE-1B55-B8AF-298A-74EE2C28E56A}"/>
+              </a:ext>
+            </a:extLst>
+          </p:cNvPr>
+          <p:cNvSpPr>
+            <a:spLocks noGrp="1"/>
+          </p:cNvSpPr>
+          <p:nvPr>
+            <p:ph type="sldNum" sz="quarter" idx="10"/>
+          </p:nvPr>
+        </p:nvSpPr>
+        <p:spPr bwMode="auto"/>
+        <p:txBody>
+          <a:bodyPr/>
+          <a:lstStyle/>
+          <a:p>
+            <a:pPr>
+              <a:defRPr/>
+            </a:pPr>
+            <a:fld id="{BAD9BF7D-0478-54D7-062A-A9C38DB7D478}" type="slidenum">
+              <a:rPr/>
+              <a:t>12</a:t>
+            </a:fld>
+            <a:endParaRPr/>
+          </a:p>
+        </p:txBody>
+      </p:sp>
+    </p:spTree>
+    <p:extLst>
+      <p:ext uri="{BB962C8B-B14F-4D97-AF65-F5344CB8AC3E}">
+        <p14:creationId xmlns:p14="http://schemas.microsoft.com/office/powerpoint/2010/main" val="80938442"/>
+      </p:ext>
+    </p:extLst>
+  </p:cSld>
+  <p:clrMapOvr>
+    <a:masterClrMapping/>
+  </p:clrMapOvr>
+</p:notes>
+</file>
+
+<file path=ppt/notesSlides/notesSlide13.xml><?xml version="1.0" encoding="utf-8"?>
 <p:notes xmlns:a="http://schemas.openxmlformats.org/drawingml/2006/main" xmlns:r="http://schemas.openxmlformats.org/officeDocument/2006/relationships" xmlns:p="http://schemas.openxmlformats.org/presentationml/2006/main">
   <p:cSld>
     <p:spTree>
@@ -873,13 +989,135 @@
             </a:pPr>
             <a:fld id="{9626A9D3-D73D-49F1-DDE1-64391AD85964}" type="slidenum">
               <a:rPr/>
-              <a:t>12</a:t>
+              <a:t>13</a:t>
             </a:fld>
             <a:endParaRPr/>
           </a:p>
         </p:txBody>
       </p:sp>
     </p:spTree>
+  </p:cSld>
+  <p:clrMapOvr>
+    <a:masterClrMapping/>
+  </p:clrMapOvr>
+</p:notes>
+</file>
+
+<file path=ppt/notesSlides/notesSlide14.xml><?xml version="1.0" encoding="utf-8"?>
+<p:notes xmlns:a="http://schemas.openxmlformats.org/drawingml/2006/main" xmlns:r="http://schemas.openxmlformats.org/officeDocument/2006/relationships" xmlns:p="http://schemas.openxmlformats.org/presentationml/2006/main">
+  <p:cSld>
+    <p:spTree>
+      <p:nvGrpSpPr>
+        <p:cNvPr id="1" name="">
+          <a:extLst>
+            <a:ext uri="{FF2B5EF4-FFF2-40B4-BE49-F238E27FC236}">
+              <a16:creationId xmlns:a16="http://schemas.microsoft.com/office/drawing/2014/main" id="{09733ED9-931A-28B7-0E38-B4647A171634}"/>
+            </a:ext>
+          </a:extLst>
+        </p:cNvPr>
+        <p:cNvGrpSpPr/>
+        <p:nvPr/>
+      </p:nvGrpSpPr>
+      <p:grpSpPr bwMode="auto">
+        <a:xfrm>
+          <a:off x="0" y="0"/>
+          <a:ext cx="0" cy="0"/>
+          <a:chOff x="0" y="0"/>
+          <a:chExt cx="0" cy="0"/>
+        </a:xfrm>
+      </p:grpSpPr>
+      <p:sp>
+        <p:nvSpPr>
+          <p:cNvPr id="1111319288" name="Рисунок 1">
+            <a:extLst>
+              <a:ext uri="{FF2B5EF4-FFF2-40B4-BE49-F238E27FC236}">
+                <a16:creationId xmlns:a16="http://schemas.microsoft.com/office/drawing/2014/main" id="{0DF8CCA4-6DAF-1DC5-041D-C19ECBB71742}"/>
+              </a:ext>
+            </a:extLst>
+          </p:cNvPr>
+          <p:cNvSpPr>
+            <a:spLocks noGrp="1" noRot="1" noChangeAspect="1"/>
+          </p:cNvSpPr>
+          <p:nvPr>
+            <p:ph type="sldImg"/>
+          </p:nvPr>
+        </p:nvSpPr>
+        <p:spPr bwMode="auto">
+          <a:xfrm>
+            <a:off x="685800" y="1143000"/>
+            <a:ext cx="5486400" cy="3086100"/>
+          </a:xfrm>
+        </p:spPr>
+      </p:sp>
+      <p:sp>
+        <p:nvSpPr>
+          <p:cNvPr id="232882814" name="Текст 2">
+            <a:extLst>
+              <a:ext uri="{FF2B5EF4-FFF2-40B4-BE49-F238E27FC236}">
+                <a16:creationId xmlns:a16="http://schemas.microsoft.com/office/drawing/2014/main" id="{533EB9A4-6835-3CF8-D3A1-F8390F2F6A7C}"/>
+              </a:ext>
+            </a:extLst>
+          </p:cNvPr>
+          <p:cNvSpPr>
+            <a:spLocks noGrp="1"/>
+          </p:cNvSpPr>
+          <p:nvPr>
+            <p:ph type="body" idx="1"/>
+          </p:nvPr>
+        </p:nvSpPr>
+        <p:spPr bwMode="auto"/>
+        <p:txBody>
+          <a:bodyPr/>
+          <a:lstStyle/>
+          <a:p>
+            <a:pPr>
+              <a:defRPr/>
+            </a:pPr>
+            <a:endParaRPr lang="ru-RU">
+              <a:latin typeface="Arial"/>
+              <a:cs typeface="Arial"/>
+            </a:endParaRPr>
+          </a:p>
+        </p:txBody>
+      </p:sp>
+      <p:sp>
+        <p:nvSpPr>
+          <p:cNvPr id="1068084193" name="Номер слайда 3">
+            <a:extLst>
+              <a:ext uri="{FF2B5EF4-FFF2-40B4-BE49-F238E27FC236}">
+                <a16:creationId xmlns:a16="http://schemas.microsoft.com/office/drawing/2014/main" id="{AB066513-7B59-A620-B1BB-4638C2CAB92E}"/>
+              </a:ext>
+            </a:extLst>
+          </p:cNvPr>
+          <p:cNvSpPr>
+            <a:spLocks noGrp="1"/>
+          </p:cNvSpPr>
+          <p:nvPr>
+            <p:ph type="sldNum" sz="quarter" idx="10"/>
+          </p:nvPr>
+        </p:nvSpPr>
+        <p:spPr bwMode="auto"/>
+        <p:txBody>
+          <a:bodyPr/>
+          <a:lstStyle/>
+          <a:p>
+            <a:pPr>
+              <a:defRPr/>
+            </a:pPr>
+            <a:fld id="{44F1F649-7695-80F5-9701-CCEAE394C69C}" type="slidenum">
+              <a:rPr lang="ru-RU"/>
+              <a:t>14</a:t>
+            </a:fld>
+            <a:endParaRPr lang="ru-RU"/>
+          </a:p>
+        </p:txBody>
+      </p:sp>
+    </p:spTree>
+    <p:extLst>
+      <p:ext uri="{BB962C8B-B14F-4D97-AF65-F5344CB8AC3E}">
+        <p14:creationId xmlns:p14="http://schemas.microsoft.com/office/powerpoint/2010/main" val="2511286410"/>
+      </p:ext>
+    </p:extLst>
   </p:cSld>
   <p:clrMapOvr>
     <a:masterClrMapping/>
@@ -1317,7 +1555,13 @@
   <p:cSld>
     <p:spTree>
       <p:nvGrpSpPr>
-        <p:cNvPr id="1" name=""/>
+        <p:cNvPr id="1" name="">
+          <a:extLst>
+            <a:ext uri="{FF2B5EF4-FFF2-40B4-BE49-F238E27FC236}">
+              <a16:creationId xmlns:a16="http://schemas.microsoft.com/office/drawing/2014/main" id="{4393DD3C-3C65-1764-A29C-5283238D58FA}"/>
+            </a:ext>
+          </a:extLst>
+        </p:cNvPr>
         <p:cNvGrpSpPr/>
         <p:nvPr/>
       </p:nvGrpSpPr>
@@ -1331,7 +1575,13 @@
       </p:grpSpPr>
       <p:sp>
         <p:nvSpPr>
-          <p:cNvPr id="2" name="Slide Image Placeholder 1"/>
+          <p:cNvPr id="2" name="Slide Image Placeholder 1">
+            <a:extLst>
+              <a:ext uri="{FF2B5EF4-FFF2-40B4-BE49-F238E27FC236}">
+                <a16:creationId xmlns:a16="http://schemas.microsoft.com/office/drawing/2014/main" id="{6A447CA3-233B-3EC9-5965-A1E35EE0B0F2}"/>
+              </a:ext>
+            </a:extLst>
+          </p:cNvPr>
           <p:cNvSpPr>
             <a:spLocks noGrp="1" noRot="1" noChangeAspect="1"/>
           </p:cNvSpPr>
@@ -1343,7 +1593,13 @@
       </p:sp>
       <p:sp>
         <p:nvSpPr>
-          <p:cNvPr id="3" name="Notes Placeholder 2"/>
+          <p:cNvPr id="3" name="Notes Placeholder 2">
+            <a:extLst>
+              <a:ext uri="{FF2B5EF4-FFF2-40B4-BE49-F238E27FC236}">
+                <a16:creationId xmlns:a16="http://schemas.microsoft.com/office/drawing/2014/main" id="{C1EB8764-CFA6-3022-9711-60C1A95B2312}"/>
+              </a:ext>
+            </a:extLst>
+          </p:cNvPr>
           <p:cNvSpPr>
             <a:spLocks noGrp="1"/>
           </p:cNvSpPr>
@@ -1365,7 +1621,13 @@
       </p:sp>
       <p:sp>
         <p:nvSpPr>
-          <p:cNvPr id="4" name="Slide Number Placeholder 3"/>
+          <p:cNvPr id="4" name="Slide Number Placeholder 3">
+            <a:extLst>
+              <a:ext uri="{FF2B5EF4-FFF2-40B4-BE49-F238E27FC236}">
+                <a16:creationId xmlns:a16="http://schemas.microsoft.com/office/drawing/2014/main" id="{BDC5D28A-5039-2CD6-9FCA-11E98F532033}"/>
+              </a:ext>
+            </a:extLst>
+          </p:cNvPr>
           <p:cNvSpPr>
             <a:spLocks noGrp="1"/>
           </p:cNvSpPr>
@@ -1381,7 +1643,7 @@
             <a:pPr>
               <a:defRPr/>
             </a:pPr>
-            <a:fld id="{D5EC82B5-E11D-E14B-C44F-8FC036AE6ADC}" type="slidenum">
+            <a:fld id="{E19AC517-8BA4-9FE1-B38D-1E424EF112D7}" type="slidenum">
               <a:rPr/>
               <a:t>7</a:t>
             </a:fld>
@@ -1390,6 +1652,11 @@
         </p:txBody>
       </p:sp>
     </p:spTree>
+    <p:extLst>
+      <p:ext uri="{BB962C8B-B14F-4D97-AF65-F5344CB8AC3E}">
+        <p14:creationId xmlns:p14="http://schemas.microsoft.com/office/powerpoint/2010/main" val="2021211457"/>
+      </p:ext>
+    </p:extLst>
   </p:cSld>
   <p:clrMapOvr>
     <a:masterClrMapping/>
@@ -1402,7 +1669,13 @@
   <p:cSld>
     <p:spTree>
       <p:nvGrpSpPr>
-        <p:cNvPr id="1" name=""/>
+        <p:cNvPr id="1" name="">
+          <a:extLst>
+            <a:ext uri="{FF2B5EF4-FFF2-40B4-BE49-F238E27FC236}">
+              <a16:creationId xmlns:a16="http://schemas.microsoft.com/office/drawing/2014/main" id="{CA34BDBD-ECD8-3B3E-B004-017518BFC3F7}"/>
+            </a:ext>
+          </a:extLst>
+        </p:cNvPr>
         <p:cNvGrpSpPr/>
         <p:nvPr/>
       </p:nvGrpSpPr>
@@ -1416,7 +1689,13 @@
       </p:grpSpPr>
       <p:sp>
         <p:nvSpPr>
-          <p:cNvPr id="2" name="Slide Image Placeholder 1"/>
+          <p:cNvPr id="2" name="Slide Image Placeholder 1">
+            <a:extLst>
+              <a:ext uri="{FF2B5EF4-FFF2-40B4-BE49-F238E27FC236}">
+                <a16:creationId xmlns:a16="http://schemas.microsoft.com/office/drawing/2014/main" id="{E24FB6B9-99D7-728C-B84C-8E0D0A6D1432}"/>
+              </a:ext>
+            </a:extLst>
+          </p:cNvPr>
           <p:cNvSpPr>
             <a:spLocks noGrp="1" noRot="1" noChangeAspect="1"/>
           </p:cNvSpPr>
@@ -1428,7 +1707,13 @@
       </p:sp>
       <p:sp>
         <p:nvSpPr>
-          <p:cNvPr id="3" name="Notes Placeholder 2"/>
+          <p:cNvPr id="3" name="Notes Placeholder 2">
+            <a:extLst>
+              <a:ext uri="{FF2B5EF4-FFF2-40B4-BE49-F238E27FC236}">
+                <a16:creationId xmlns:a16="http://schemas.microsoft.com/office/drawing/2014/main" id="{F5C63586-13F0-5F88-F93F-7417CBFDA332}"/>
+              </a:ext>
+            </a:extLst>
+          </p:cNvPr>
           <p:cNvSpPr>
             <a:spLocks noGrp="1"/>
           </p:cNvSpPr>
@@ -1450,7 +1735,13 @@
       </p:sp>
       <p:sp>
         <p:nvSpPr>
-          <p:cNvPr id="4" name="Slide Number Placeholder 3"/>
+          <p:cNvPr id="4" name="Slide Number Placeholder 3">
+            <a:extLst>
+              <a:ext uri="{FF2B5EF4-FFF2-40B4-BE49-F238E27FC236}">
+                <a16:creationId xmlns:a16="http://schemas.microsoft.com/office/drawing/2014/main" id="{04D87667-4B1B-D99F-D4B4-A311FB2B752F}"/>
+              </a:ext>
+            </a:extLst>
+          </p:cNvPr>
           <p:cNvSpPr>
             <a:spLocks noGrp="1"/>
           </p:cNvSpPr>
@@ -1466,7 +1757,7 @@
             <a:pPr>
               <a:defRPr/>
             </a:pPr>
-            <a:fld id="{D0481A7B-66EE-369C-41E4-B7D2FFB879D9}" type="slidenum">
+            <a:fld id="{E19AC517-8BA4-9FE1-B38D-1E424EF112D7}" type="slidenum">
               <a:rPr/>
               <a:t>8</a:t>
             </a:fld>
@@ -1475,6 +1766,11 @@
         </p:txBody>
       </p:sp>
     </p:spTree>
+    <p:extLst>
+      <p:ext uri="{BB962C8B-B14F-4D97-AF65-F5344CB8AC3E}">
+        <p14:creationId xmlns:p14="http://schemas.microsoft.com/office/powerpoint/2010/main" val="2016445162"/>
+      </p:ext>
+    </p:extLst>
   </p:cSld>
   <p:clrMapOvr>
     <a:masterClrMapping/>
@@ -1487,7 +1783,13 @@
   <p:cSld>
     <p:spTree>
       <p:nvGrpSpPr>
-        <p:cNvPr id="1" name=""/>
+        <p:cNvPr id="1" name="">
+          <a:extLst>
+            <a:ext uri="{FF2B5EF4-FFF2-40B4-BE49-F238E27FC236}">
+              <a16:creationId xmlns:a16="http://schemas.microsoft.com/office/drawing/2014/main" id="{C041ED75-473F-1C26-D3CE-05D1F12B2FAB}"/>
+            </a:ext>
+          </a:extLst>
+        </p:cNvPr>
         <p:cNvGrpSpPr/>
         <p:nvPr/>
       </p:nvGrpSpPr>
@@ -1501,7 +1803,13 @@
       </p:grpSpPr>
       <p:sp>
         <p:nvSpPr>
-          <p:cNvPr id="2" name="Slide Image Placeholder 1"/>
+          <p:cNvPr id="2" name="Slide Image Placeholder 1">
+            <a:extLst>
+              <a:ext uri="{FF2B5EF4-FFF2-40B4-BE49-F238E27FC236}">
+                <a16:creationId xmlns:a16="http://schemas.microsoft.com/office/drawing/2014/main" id="{E74135FB-5ECD-52E6-35D2-8E9914B1C0AE}"/>
+              </a:ext>
+            </a:extLst>
+          </p:cNvPr>
           <p:cNvSpPr>
             <a:spLocks noGrp="1" noRot="1" noChangeAspect="1"/>
           </p:cNvSpPr>
@@ -1513,7 +1821,13 @@
       </p:sp>
       <p:sp>
         <p:nvSpPr>
-          <p:cNvPr id="3" name="Notes Placeholder 2"/>
+          <p:cNvPr id="3" name="Notes Placeholder 2">
+            <a:extLst>
+              <a:ext uri="{FF2B5EF4-FFF2-40B4-BE49-F238E27FC236}">
+                <a16:creationId xmlns:a16="http://schemas.microsoft.com/office/drawing/2014/main" id="{80E77059-FB54-14D9-7309-659A4A8C55CB}"/>
+              </a:ext>
+            </a:extLst>
+          </p:cNvPr>
           <p:cNvSpPr>
             <a:spLocks noGrp="1"/>
           </p:cNvSpPr>
@@ -1535,7 +1849,13 @@
       </p:sp>
       <p:sp>
         <p:nvSpPr>
-          <p:cNvPr id="4" name="Slide Number Placeholder 3"/>
+          <p:cNvPr id="4" name="Slide Number Placeholder 3">
+            <a:extLst>
+              <a:ext uri="{FF2B5EF4-FFF2-40B4-BE49-F238E27FC236}">
+                <a16:creationId xmlns:a16="http://schemas.microsoft.com/office/drawing/2014/main" id="{F92100F0-214F-3497-D8A4-A17B1B8B4DA8}"/>
+              </a:ext>
+            </a:extLst>
+          </p:cNvPr>
           <p:cNvSpPr>
             <a:spLocks noGrp="1"/>
           </p:cNvSpPr>
@@ -1551,7 +1871,7 @@
             <a:pPr>
               <a:defRPr/>
             </a:pPr>
-            <a:fld id="{BAD9BF7D-0478-54D7-062A-A9C38DB7D478}" type="slidenum">
+            <a:fld id="{E19AC517-8BA4-9FE1-B38D-1E424EF112D7}" type="slidenum">
               <a:rPr/>
               <a:t>9</a:t>
             </a:fld>
@@ -1560,6 +1880,11 @@
         </p:txBody>
       </p:sp>
     </p:spTree>
+    <p:extLst>
+      <p:ext uri="{BB962C8B-B14F-4D97-AF65-F5344CB8AC3E}">
+        <p14:creationId xmlns:p14="http://schemas.microsoft.com/office/powerpoint/2010/main" val="178028522"/>
+      </p:ext>
+    </p:extLst>
   </p:cSld>
   <p:clrMapOvr>
     <a:masterClrMapping/>
@@ -1705,7 +2030,7 @@
             </a:pPr>
             <a:fld id="{6383A283-2DA7-47D7-B284-CB893B00F90B}" type="datetime1">
               <a:rPr lang="ru-RU" smtClean="0"/>
-              <a:t>06.06.2026</a:t>
+              <a:t>10.06.2026</a:t>
             </a:fld>
             <a:endParaRPr lang="ru-RU"/>
           </a:p>
@@ -1894,7 +2219,7 @@
             </a:pPr>
             <a:fld id="{A685021C-B115-48DF-A594-6138827F692C}" type="datetime1">
               <a:rPr lang="ru-RU" smtClean="0"/>
-              <a:t>06.06.2026</a:t>
+              <a:t>10.06.2026</a:t>
             </a:fld>
             <a:endParaRPr lang="ru-RU"/>
           </a:p>
@@ -2093,7 +2418,7 @@
             </a:pPr>
             <a:fld id="{EDC7C8E5-BD86-480D-AA0A-0D4106F1C047}" type="datetime1">
               <a:rPr lang="ru-RU" smtClean="0"/>
-              <a:t>06.06.2026</a:t>
+              <a:t>10.06.2026</a:t>
             </a:fld>
             <a:endParaRPr lang="ru-RU"/>
           </a:p>
@@ -2282,7 +2607,7 @@
             </a:pPr>
             <a:fld id="{3B189735-AE42-49FE-8035-C952F087A343}" type="datetime1">
               <a:rPr lang="ru-RU" smtClean="0"/>
-              <a:t>06.06.2026</a:t>
+              <a:t>10.06.2026</a:t>
             </a:fld>
             <a:endParaRPr lang="ru-RU"/>
           </a:p>
@@ -2537,7 +2862,7 @@
             </a:pPr>
             <a:fld id="{FD75EC3F-4431-4680-BD27-BEBD9B9DA6DE}" type="datetime1">
               <a:rPr lang="ru-RU" smtClean="0"/>
-              <a:t>06.06.2026</a:t>
+              <a:t>10.06.2026</a:t>
             </a:fld>
             <a:endParaRPr lang="ru-RU"/>
           </a:p>
@@ -2801,7 +3126,7 @@
             </a:pPr>
             <a:fld id="{AC11FC95-0AD7-4F65-9735-0DC5F76C0466}" type="datetime1">
               <a:rPr lang="ru-RU" smtClean="0"/>
-              <a:t>06.06.2026</a:t>
+              <a:t>10.06.2026</a:t>
             </a:fld>
             <a:endParaRPr lang="ru-RU"/>
           </a:p>
@@ -3206,7 +3531,7 @@
             </a:pPr>
             <a:fld id="{8D7C48D1-9B84-4A04-A5CD-522F3BC930D9}" type="datetime1">
               <a:rPr lang="ru-RU" smtClean="0"/>
-              <a:t>06.06.2026</a:t>
+              <a:t>10.06.2026</a:t>
             </a:fld>
             <a:endParaRPr lang="ru-RU"/>
           </a:p>
@@ -3330,7 +3655,7 @@
             </a:pPr>
             <a:fld id="{5E936806-4A77-4160-A31A-83585A77CDD3}" type="datetime1">
               <a:rPr lang="ru-RU" smtClean="0"/>
-              <a:t>06.06.2026</a:t>
+              <a:t>10.06.2026</a:t>
             </a:fld>
             <a:endParaRPr lang="ru-RU"/>
           </a:p>
@@ -3429,7 +3754,7 @@
             </a:pPr>
             <a:fld id="{E39F75B5-0D8E-4552-B226-99E0563FC978}" type="datetime1">
               <a:rPr lang="ru-RU" smtClean="0"/>
-              <a:t>06.06.2026</a:t>
+              <a:t>10.06.2026</a:t>
             </a:fld>
             <a:endParaRPr lang="ru-RU"/>
           </a:p>
@@ -3728,7 +4053,7 @@
             </a:pPr>
             <a:fld id="{063E4957-4CC0-45CF-AE7E-4C7910909290}" type="datetime1">
               <a:rPr lang="ru-RU" smtClean="0"/>
-              <a:t>06.06.2026</a:t>
+              <a:t>10.06.2026</a:t>
             </a:fld>
             <a:endParaRPr lang="ru-RU"/>
           </a:p>
@@ -3996,7 +4321,7 @@
             </a:pPr>
             <a:fld id="{5F64ED88-44AF-4B32-BBCB-9532DD61A8EB}" type="datetime1">
               <a:rPr lang="ru-RU" smtClean="0"/>
-              <a:t>06.06.2026</a:t>
+              <a:t>10.06.2026</a:t>
             </a:fld>
             <a:endParaRPr lang="ru-RU"/>
           </a:p>
@@ -4228,7 +4553,7 @@
             </a:pPr>
             <a:fld id="{A3385924-9B85-4156-93C8-0C6CC4D7714B}" type="datetime1">
               <a:rPr lang="ru-RU" smtClean="0"/>
-              <a:t>06.06.2026</a:t>
+              <a:t>10.06.2026</a:t>
             </a:fld>
             <a:endParaRPr lang="ru-RU"/>
           </a:p>
@@ -5288,221 +5613,28 @@
       </p:grpSpPr>
       <p:sp>
         <p:nvSpPr>
-          <p:cNvPr id="1592329149" name="Заголовок 1"/>
+          <p:cNvPr id="210375120" name="Заголовок 1"/>
           <p:cNvSpPr>
             <a:spLocks noGrp="1"/>
           </p:cNvSpPr>
           <p:nvPr>
             <p:ph type="title"/>
           </p:nvPr>
-        </p:nvSpPr>
-        <p:spPr bwMode="auto"/>
-        <p:txBody>
-          <a:bodyPr/>
-          <a:lstStyle/>
-          <a:p>
-            <a:pPr>
-              <a:defRPr/>
-            </a:pPr>
-            <a:r>
-              <a:t>Реализация интерфейса</a:t>
-            </a:r>
-          </a:p>
-        </p:txBody>
-      </p:sp>
-      <p:sp>
-        <p:nvSpPr>
-          <p:cNvPr id="1977041740" name="Объект 6"/>
-          <p:cNvSpPr>
-            <a:spLocks noGrp="1"/>
-          </p:cNvSpPr>
-          <p:nvPr/>
         </p:nvSpPr>
         <p:spPr bwMode="auto">
           <a:xfrm>
-            <a:off x="9825930" y="2004486"/>
-            <a:ext cx="2136321" cy="841261"/>
+            <a:off x="838200" y="365125"/>
+            <a:ext cx="10515600" cy="1325563"/>
           </a:xfrm>
         </p:spPr>
         <p:txBody>
-          <a:bodyPr vertOverflow="overflow" horzOverflow="overflow" vert="horz" wrap="square" lIns="91440" tIns="45720" rIns="91440" bIns="45720" numCol="1" spcCol="0" rtlCol="0" fromWordArt="0" anchor="t" anchorCtr="0" forceAA="0" compatLnSpc="0">
-            <a:normAutofit fontScale="85000" lnSpcReduction="20000"/>
-          </a:bodyPr>
-          <a:lstStyle>
-            <a:lvl1pPr marL="228600" indent="-228600" algn="l" defTabSz="914400" rtl="0">
-              <a:lnSpc>
-                <a:spcPct val="90000"/>
-              </a:lnSpc>
-              <a:spcBef>
-                <a:spcPts val="997"/>
-              </a:spcBef>
-              <a:buFont typeface="Arial"/>
-              <a:buChar char="•"/>
-              <a:defRPr sz="2800">
-                <a:solidFill>
-                  <a:schemeClr val="tx1"/>
-                </a:solidFill>
-                <a:latin typeface="+mn-lt"/>
-                <a:ea typeface="+mn-ea"/>
-                <a:cs typeface="+mn-cs"/>
-              </a:defRPr>
-            </a:lvl1pPr>
-            <a:lvl2pPr marL="685800" indent="-228600" algn="l" defTabSz="914400" rtl="0">
-              <a:lnSpc>
-                <a:spcPct val="90000"/>
-              </a:lnSpc>
-              <a:spcBef>
-                <a:spcPts val="497"/>
-              </a:spcBef>
-              <a:buFont typeface="Arial"/>
-              <a:buChar char="•"/>
-              <a:defRPr sz="2400">
-                <a:solidFill>
-                  <a:schemeClr val="tx1"/>
-                </a:solidFill>
-                <a:latin typeface="+mn-lt"/>
-                <a:ea typeface="+mn-ea"/>
-                <a:cs typeface="+mn-cs"/>
-              </a:defRPr>
-            </a:lvl2pPr>
-            <a:lvl3pPr marL="1143000" indent="-228600" algn="l" defTabSz="914400" rtl="0">
-              <a:lnSpc>
-                <a:spcPct val="90000"/>
-              </a:lnSpc>
-              <a:spcBef>
-                <a:spcPts val="497"/>
-              </a:spcBef>
-              <a:buFont typeface="Arial"/>
-              <a:buChar char="•"/>
-              <a:defRPr sz="2000">
-                <a:solidFill>
-                  <a:schemeClr val="tx1"/>
-                </a:solidFill>
-                <a:latin typeface="+mn-lt"/>
-                <a:ea typeface="+mn-ea"/>
-                <a:cs typeface="+mn-cs"/>
-              </a:defRPr>
-            </a:lvl3pPr>
-            <a:lvl4pPr marL="1600200" indent="-228600" algn="l" defTabSz="914400" rtl="0">
-              <a:lnSpc>
-                <a:spcPct val="90000"/>
-              </a:lnSpc>
-              <a:spcBef>
-                <a:spcPts val="497"/>
-              </a:spcBef>
-              <a:buFont typeface="Arial"/>
-              <a:buChar char="•"/>
-              <a:defRPr sz="1800">
-                <a:solidFill>
-                  <a:schemeClr val="tx1"/>
-                </a:solidFill>
-                <a:latin typeface="+mn-lt"/>
-                <a:ea typeface="+mn-ea"/>
-                <a:cs typeface="+mn-cs"/>
-              </a:defRPr>
-            </a:lvl4pPr>
-            <a:lvl5pPr marL="2057400" indent="-228600" algn="l" defTabSz="914400" rtl="0">
-              <a:lnSpc>
-                <a:spcPct val="90000"/>
-              </a:lnSpc>
-              <a:spcBef>
-                <a:spcPts val="497"/>
-              </a:spcBef>
-              <a:buFont typeface="Arial"/>
-              <a:buChar char="•"/>
-              <a:defRPr sz="1800">
-                <a:solidFill>
-                  <a:schemeClr val="tx1"/>
-                </a:solidFill>
-                <a:latin typeface="+mn-lt"/>
-                <a:ea typeface="+mn-ea"/>
-                <a:cs typeface="+mn-cs"/>
-              </a:defRPr>
-            </a:lvl5pPr>
-            <a:lvl6pPr marL="2514597" indent="-228600" algn="l" defTabSz="914400" rtl="0">
-              <a:lnSpc>
-                <a:spcPct val="90000"/>
-              </a:lnSpc>
-              <a:spcBef>
-                <a:spcPts val="497"/>
-              </a:spcBef>
-              <a:buFont typeface="Arial"/>
-              <a:buChar char="•"/>
-              <a:defRPr sz="1800">
-                <a:solidFill>
-                  <a:schemeClr val="tx1"/>
-                </a:solidFill>
-                <a:latin typeface="+mn-lt"/>
-                <a:ea typeface="+mn-ea"/>
-                <a:cs typeface="+mn-cs"/>
-              </a:defRPr>
-            </a:lvl6pPr>
-            <a:lvl7pPr marL="2971800" indent="-228600" algn="l" defTabSz="914400" rtl="0">
-              <a:lnSpc>
-                <a:spcPct val="90000"/>
-              </a:lnSpc>
-              <a:spcBef>
-                <a:spcPts val="497"/>
-              </a:spcBef>
-              <a:buFont typeface="Arial"/>
-              <a:buChar char="•"/>
-              <a:defRPr sz="1800">
-                <a:solidFill>
-                  <a:schemeClr val="tx1"/>
-                </a:solidFill>
-                <a:latin typeface="+mn-lt"/>
-                <a:ea typeface="+mn-ea"/>
-                <a:cs typeface="+mn-cs"/>
-              </a:defRPr>
-            </a:lvl7pPr>
-            <a:lvl8pPr marL="3429000" indent="-228600" algn="l" defTabSz="914400" rtl="0">
-              <a:lnSpc>
-                <a:spcPct val="90000"/>
-              </a:lnSpc>
-              <a:spcBef>
-                <a:spcPts val="497"/>
-              </a:spcBef>
-              <a:buFont typeface="Arial"/>
-              <a:buChar char="•"/>
-              <a:defRPr sz="1800">
-                <a:solidFill>
-                  <a:schemeClr val="tx1"/>
-                </a:solidFill>
-                <a:latin typeface="+mn-lt"/>
-                <a:ea typeface="+mn-ea"/>
-                <a:cs typeface="+mn-cs"/>
-              </a:defRPr>
-            </a:lvl8pPr>
-            <a:lvl9pPr marL="3886200" indent="-228600" algn="l" defTabSz="914400" rtl="0">
-              <a:lnSpc>
-                <a:spcPct val="90000"/>
-              </a:lnSpc>
-              <a:spcBef>
-                <a:spcPts val="497"/>
-              </a:spcBef>
-              <a:buFont typeface="Arial"/>
-              <a:buChar char="•"/>
-              <a:defRPr sz="1800">
-                <a:solidFill>
-                  <a:schemeClr val="tx1"/>
-                </a:solidFill>
-                <a:latin typeface="+mn-lt"/>
-                <a:ea typeface="+mn-ea"/>
-                <a:cs typeface="+mn-cs"/>
-              </a:defRPr>
-            </a:lvl9pPr>
-          </a:lstStyle>
-          <a:p>
-            <a:pPr marL="0" indent="0" algn="ctr">
-              <a:buFont typeface="Arial"/>
-              <a:buNone/>
-              <a:defRPr/>
-            </a:pPr>
-            <a:r>
-              <a:rPr lang="ru-RU" sz="2800" dirty="0"/>
-              <a:t>Экран сохранённого расписания</a:t>
-            </a:r>
-            <a:endParaRPr sz="2800" dirty="0"/>
+          <a:bodyPr/>
+          <a:lstStyle/>
+          <a:p>
+            <a:r>
+              <a:rPr lang="ru-RU" dirty="0"/>
+              <a:t>Реализация интерфейса</a:t>
+            </a:r>
           </a:p>
         </p:txBody>
       </p:sp>
@@ -5511,7 +5643,7 @@
           <p:cNvPr id="2" name="Номер слайда 1">
             <a:extLst>
               <a:ext uri="{FF2B5EF4-FFF2-40B4-BE49-F238E27FC236}">
-                <a16:creationId xmlns:a16="http://schemas.microsoft.com/office/drawing/2014/main" id="{BF59E525-4B9A-5127-B163-450E40B682B0}"/>
+                <a16:creationId xmlns:a16="http://schemas.microsoft.com/office/drawing/2014/main" id="{28A6B49F-B607-68EC-A5DE-7A9BEAEC88A3}"/>
               </a:ext>
             </a:extLst>
           </p:cNvPr>
@@ -5522,16 +5654,19 @@
             <p:ph type="sldNum" sz="quarter" idx="12"/>
           </p:nvPr>
         </p:nvSpPr>
-        <p:spPr/>
-        <p:txBody>
-          <a:bodyPr/>
-          <a:lstStyle/>
-          <a:p>
-            <a:pPr>
-              <a:defRPr/>
-            </a:pPr>
+        <p:spPr>
+          <a:xfrm>
+            <a:off x="8610600" y="6356350"/>
+            <a:ext cx="2743200" cy="365125"/>
+          </a:xfrm>
+        </p:spPr>
+        <p:txBody>
+          <a:bodyPr/>
+          <a:lstStyle/>
+          <a:p>
             <a:fld id="{08395586-F03A-48D1-94DF-16B239DF4FB5}" type="slidenum">
               <a:rPr lang="ru-RU" smtClean="0"/>
+              <a:pPr/>
               <a:t>10</a:t>
             </a:fld>
             <a:endParaRPr lang="ru-RU"/>
@@ -5543,7 +5678,7 @@
           <p:cNvPr id="3" name="Рисунок 2">
             <a:extLst>
               <a:ext uri="{FF2B5EF4-FFF2-40B4-BE49-F238E27FC236}">
-                <a16:creationId xmlns:a16="http://schemas.microsoft.com/office/drawing/2014/main" id="{BB74BFC3-AFA0-6DE4-1ABE-8E1F6D8363BA}"/>
+                <a16:creationId xmlns:a16="http://schemas.microsoft.com/office/drawing/2014/main" id="{BE5546A0-606F-215E-13F4-B32B0D61828D}"/>
               </a:ext>
             </a:extLst>
           </p:cNvPr>
@@ -5552,7 +5687,7 @@
           </p:cNvPicPr>
           <p:nvPr/>
         </p:nvPicPr>
-        <p:blipFill>
+        <p:blipFill rotWithShape="1">
           <a:blip r:embed="rId3" cstate="print">
             <a:extLst>
               <a:ext uri="{28A0092B-C50C-407E-A947-70E740481C1C}">
@@ -5560,15 +5695,15 @@
               </a:ext>
             </a:extLst>
           </a:blip>
-          <a:srcRect/>
+          <a:srcRect t="3130" b="5641"/>
           <a:stretch>
             <a:fillRect/>
           </a:stretch>
         </p:blipFill>
         <p:spPr bwMode="auto">
           <a:xfrm>
-            <a:off x="7395269" y="1690688"/>
-            <a:ext cx="2430661" cy="4939265"/>
+            <a:off x="976767" y="1560864"/>
+            <a:ext cx="2594842" cy="5261013"/>
           </a:xfrm>
           <a:prstGeom prst="rect">
             <a:avLst/>
@@ -5577,19 +5712,78 @@
           <a:ln>
             <a:noFill/>
           </a:ln>
+          <a:extLst>
+            <a:ext uri="{53640926-AAD7-44D8-BBD7-CCE9431645EC}">
+              <a14:shadowObscured xmlns:a14="http://schemas.microsoft.com/office/drawing/2010/main"/>
+            </a:ext>
+          </a:extLst>
         </p:spPr>
       </p:pic>
+      <p:sp>
+        <p:nvSpPr>
+          <p:cNvPr id="8" name="Заголовок 1">
+            <a:extLst>
+              <a:ext uri="{FF2B5EF4-FFF2-40B4-BE49-F238E27FC236}">
+                <a16:creationId xmlns:a16="http://schemas.microsoft.com/office/drawing/2014/main" id="{202A8E9D-2A1C-0B0A-53A0-4E137E11CE4C}"/>
+              </a:ext>
+            </a:extLst>
+          </p:cNvPr>
+          <p:cNvSpPr txBox="1">
+            <a:spLocks/>
+          </p:cNvSpPr>
+          <p:nvPr/>
+        </p:nvSpPr>
+        <p:spPr bwMode="auto">
+          <a:xfrm>
+            <a:off x="7573343" y="1492683"/>
+            <a:ext cx="3390030" cy="620713"/>
+          </a:xfrm>
+          <a:prstGeom prst="rect">
+            <a:avLst/>
+          </a:prstGeom>
+        </p:spPr>
+        <p:txBody>
+          <a:bodyPr vert="horz" lIns="91440" tIns="45720" rIns="91440" bIns="45720" rtlCol="0" anchor="ctr">
+            <a:normAutofit/>
+          </a:bodyPr>
+          <a:lstStyle>
+            <a:lvl1pPr algn="l" defTabSz="914400" rtl="0">
+              <a:lnSpc>
+                <a:spcPct val="90000"/>
+              </a:lnSpc>
+              <a:spcBef>
+                <a:spcPts val="0"/>
+              </a:spcBef>
+              <a:buNone/>
+              <a:defRPr sz="4400">
+                <a:solidFill>
+                  <a:schemeClr val="tx1"/>
+                </a:solidFill>
+                <a:latin typeface="+mj-lt"/>
+                <a:ea typeface="+mj-ea"/>
+                <a:cs typeface="+mj-cs"/>
+              </a:defRPr>
+            </a:lvl1pPr>
+          </a:lstStyle>
+          <a:p>
+            <a:r>
+              <a:rPr lang="ru-RU" sz="3200" dirty="0"/>
+              <a:t>Главный экран</a:t>
+            </a:r>
+          </a:p>
+        </p:txBody>
+      </p:sp>
       <p:pic>
         <p:nvPicPr>
-          <p:cNvPr id="6" name="Рисунок 5">
+          <p:cNvPr id="1026" name="Picture 2">
             <a:extLst>
               <a:ext uri="{FF2B5EF4-FFF2-40B4-BE49-F238E27FC236}">
-                <a16:creationId xmlns:a16="http://schemas.microsoft.com/office/drawing/2014/main" id="{82EDB655-FC5D-002C-644B-FEB7654A8A03}"/>
+                <a16:creationId xmlns:a16="http://schemas.microsoft.com/office/drawing/2014/main" id="{79ABAA3D-2646-2505-6D05-8D2B59AD1134}"/>
               </a:ext>
             </a:extLst>
           </p:cNvPr>
           <p:cNvPicPr>
-            <a:picLocks noChangeAspect="1"/>
+            <a:picLocks noChangeAspect="1" noChangeArrowheads="1"/>
           </p:cNvPicPr>
           <p:nvPr/>
         </p:nvPicPr>
@@ -5608,214 +5802,24 @@
         </p:blipFill>
         <p:spPr bwMode="auto">
           <a:xfrm>
-            <a:off x="2533947" y="1690189"/>
-            <a:ext cx="2430661" cy="4939764"/>
+            <a:off x="4275055" y="1560864"/>
+            <a:ext cx="2594842" cy="5272680"/>
           </a:xfrm>
           <a:prstGeom prst="rect">
             <a:avLst/>
           </a:prstGeom>
           <a:noFill/>
-          <a:ln>
-            <a:noFill/>
-          </a:ln>
+          <a:extLst>
+            <a:ext uri="{909E8E84-426E-40DD-AFC4-6F175D3DCCD1}">
+              <a14:hiddenFill xmlns:a14="http://schemas.microsoft.com/office/drawing/2010/main">
+                <a:solidFill>
+                  <a:srgbClr val="FFFFFF"/>
+                </a:solidFill>
+              </a14:hiddenFill>
+            </a:ext>
+          </a:extLst>
         </p:spPr>
       </p:pic>
-      <p:sp>
-        <p:nvSpPr>
-          <p:cNvPr id="42636527" name="Объект 6"/>
-          <p:cNvSpPr>
-            <a:spLocks noGrp="1"/>
-          </p:cNvSpPr>
-          <p:nvPr/>
-        </p:nvSpPr>
-        <p:spPr bwMode="auto">
-          <a:xfrm>
-            <a:off x="250456" y="2004486"/>
-            <a:ext cx="2136321" cy="841261"/>
-          </a:xfrm>
-        </p:spPr>
-        <p:txBody>
-          <a:bodyPr vertOverflow="overflow" horzOverflow="overflow" vert="horz" wrap="square" lIns="91440" tIns="45720" rIns="91440" bIns="45720" numCol="1" spcCol="0" rtlCol="0" fromWordArt="0" anchor="t" anchorCtr="0" forceAA="0" compatLnSpc="0">
-            <a:normAutofit fontScale="82500" lnSpcReduction="20000"/>
-          </a:bodyPr>
-          <a:lstStyle>
-            <a:lvl1pPr marL="228600" indent="-228600" algn="l" defTabSz="914400" rtl="0">
-              <a:lnSpc>
-                <a:spcPct val="90000"/>
-              </a:lnSpc>
-              <a:spcBef>
-                <a:spcPts val="997"/>
-              </a:spcBef>
-              <a:buFont typeface="Arial"/>
-              <a:buChar char="•"/>
-              <a:defRPr sz="2800">
-                <a:solidFill>
-                  <a:schemeClr val="tx1"/>
-                </a:solidFill>
-                <a:latin typeface="+mn-lt"/>
-                <a:ea typeface="+mn-ea"/>
-                <a:cs typeface="+mn-cs"/>
-              </a:defRPr>
-            </a:lvl1pPr>
-            <a:lvl2pPr marL="685800" indent="-228600" algn="l" defTabSz="914400" rtl="0">
-              <a:lnSpc>
-                <a:spcPct val="90000"/>
-              </a:lnSpc>
-              <a:spcBef>
-                <a:spcPts val="497"/>
-              </a:spcBef>
-              <a:buFont typeface="Arial"/>
-              <a:buChar char="•"/>
-              <a:defRPr sz="2400">
-                <a:solidFill>
-                  <a:schemeClr val="tx1"/>
-                </a:solidFill>
-                <a:latin typeface="+mn-lt"/>
-                <a:ea typeface="+mn-ea"/>
-                <a:cs typeface="+mn-cs"/>
-              </a:defRPr>
-            </a:lvl2pPr>
-            <a:lvl3pPr marL="1143000" indent="-228600" algn="l" defTabSz="914400" rtl="0">
-              <a:lnSpc>
-                <a:spcPct val="90000"/>
-              </a:lnSpc>
-              <a:spcBef>
-                <a:spcPts val="497"/>
-              </a:spcBef>
-              <a:buFont typeface="Arial"/>
-              <a:buChar char="•"/>
-              <a:defRPr sz="2000">
-                <a:solidFill>
-                  <a:schemeClr val="tx1"/>
-                </a:solidFill>
-                <a:latin typeface="+mn-lt"/>
-                <a:ea typeface="+mn-ea"/>
-                <a:cs typeface="+mn-cs"/>
-              </a:defRPr>
-            </a:lvl3pPr>
-            <a:lvl4pPr marL="1600200" indent="-228600" algn="l" defTabSz="914400" rtl="0">
-              <a:lnSpc>
-                <a:spcPct val="90000"/>
-              </a:lnSpc>
-              <a:spcBef>
-                <a:spcPts val="497"/>
-              </a:spcBef>
-              <a:buFont typeface="Arial"/>
-              <a:buChar char="•"/>
-              <a:defRPr sz="1800">
-                <a:solidFill>
-                  <a:schemeClr val="tx1"/>
-                </a:solidFill>
-                <a:latin typeface="+mn-lt"/>
-                <a:ea typeface="+mn-ea"/>
-                <a:cs typeface="+mn-cs"/>
-              </a:defRPr>
-            </a:lvl4pPr>
-            <a:lvl5pPr marL="2057400" indent="-228600" algn="l" defTabSz="914400" rtl="0">
-              <a:lnSpc>
-                <a:spcPct val="90000"/>
-              </a:lnSpc>
-              <a:spcBef>
-                <a:spcPts val="497"/>
-              </a:spcBef>
-              <a:buFont typeface="Arial"/>
-              <a:buChar char="•"/>
-              <a:defRPr sz="1800">
-                <a:solidFill>
-                  <a:schemeClr val="tx1"/>
-                </a:solidFill>
-                <a:latin typeface="+mn-lt"/>
-                <a:ea typeface="+mn-ea"/>
-                <a:cs typeface="+mn-cs"/>
-              </a:defRPr>
-            </a:lvl5pPr>
-            <a:lvl6pPr marL="2514597" indent="-228600" algn="l" defTabSz="914400" rtl="0">
-              <a:lnSpc>
-                <a:spcPct val="90000"/>
-              </a:lnSpc>
-              <a:spcBef>
-                <a:spcPts val="497"/>
-              </a:spcBef>
-              <a:buFont typeface="Arial"/>
-              <a:buChar char="•"/>
-              <a:defRPr sz="1800">
-                <a:solidFill>
-                  <a:schemeClr val="tx1"/>
-                </a:solidFill>
-                <a:latin typeface="+mn-lt"/>
-                <a:ea typeface="+mn-ea"/>
-                <a:cs typeface="+mn-cs"/>
-              </a:defRPr>
-            </a:lvl6pPr>
-            <a:lvl7pPr marL="2971800" indent="-228600" algn="l" defTabSz="914400" rtl="0">
-              <a:lnSpc>
-                <a:spcPct val="90000"/>
-              </a:lnSpc>
-              <a:spcBef>
-                <a:spcPts val="497"/>
-              </a:spcBef>
-              <a:buFont typeface="Arial"/>
-              <a:buChar char="•"/>
-              <a:defRPr sz="1800">
-                <a:solidFill>
-                  <a:schemeClr val="tx1"/>
-                </a:solidFill>
-                <a:latin typeface="+mn-lt"/>
-                <a:ea typeface="+mn-ea"/>
-                <a:cs typeface="+mn-cs"/>
-              </a:defRPr>
-            </a:lvl7pPr>
-            <a:lvl8pPr marL="3429000" indent="-228600" algn="l" defTabSz="914400" rtl="0">
-              <a:lnSpc>
-                <a:spcPct val="90000"/>
-              </a:lnSpc>
-              <a:spcBef>
-                <a:spcPts val="497"/>
-              </a:spcBef>
-              <a:buFont typeface="Arial"/>
-              <a:buChar char="•"/>
-              <a:defRPr sz="1800">
-                <a:solidFill>
-                  <a:schemeClr val="tx1"/>
-                </a:solidFill>
-                <a:latin typeface="+mn-lt"/>
-                <a:ea typeface="+mn-ea"/>
-                <a:cs typeface="+mn-cs"/>
-              </a:defRPr>
-            </a:lvl8pPr>
-            <a:lvl9pPr marL="3886200" indent="-228600" algn="l" defTabSz="914400" rtl="0">
-              <a:lnSpc>
-                <a:spcPct val="90000"/>
-              </a:lnSpc>
-              <a:spcBef>
-                <a:spcPts val="497"/>
-              </a:spcBef>
-              <a:buFont typeface="Arial"/>
-              <a:buChar char="•"/>
-              <a:defRPr sz="1800">
-                <a:solidFill>
-                  <a:schemeClr val="tx1"/>
-                </a:solidFill>
-                <a:latin typeface="+mn-lt"/>
-                <a:ea typeface="+mn-ea"/>
-                <a:cs typeface="+mn-cs"/>
-              </a:defRPr>
-            </a:lvl9pPr>
-          </a:lstStyle>
-          <a:p>
-            <a:pPr marL="0" indent="0" algn="ctr">
-              <a:buFont typeface="Arial"/>
-              <a:buNone/>
-              <a:defRPr/>
-            </a:pPr>
-            <a:r>
-              <a:rPr lang="ru-RU" sz="2800" dirty="0"/>
-              <a:t>Экран сохранения закладки</a:t>
-            </a:r>
-            <a:endParaRPr sz="2800" dirty="0"/>
-          </a:p>
-        </p:txBody>
-      </p:sp>
     </p:spTree>
   </p:cSld>
   <p:clrMapOvr>
@@ -5840,7 +5844,7 @@
         <p:cNvPr id="1" name="">
           <a:extLst>
             <a:ext uri="{FF2B5EF4-FFF2-40B4-BE49-F238E27FC236}">
-              <a16:creationId xmlns:a16="http://schemas.microsoft.com/office/drawing/2014/main" id="{DA540DD4-4B08-9C4D-AF63-F0809A5F366F}"/>
+              <a16:creationId xmlns:a16="http://schemas.microsoft.com/office/drawing/2014/main" id="{A4FD783F-DDCA-6102-23ED-F0AF7325AF99}"/>
             </a:ext>
           </a:extLst>
         </p:cNvPr>
@@ -5857,10 +5861,10 @@
       </p:grpSpPr>
       <p:sp>
         <p:nvSpPr>
-          <p:cNvPr id="1592329149" name="Заголовок 1">
+          <p:cNvPr id="210375120" name="Заголовок 1">
             <a:extLst>
               <a:ext uri="{FF2B5EF4-FFF2-40B4-BE49-F238E27FC236}">
-                <a16:creationId xmlns:a16="http://schemas.microsoft.com/office/drawing/2014/main" id="{6816C627-B489-9029-8C65-AAC4878E7CD2}"/>
+                <a16:creationId xmlns:a16="http://schemas.microsoft.com/office/drawing/2014/main" id="{98F9EE2D-EC57-D53D-075D-B05A36410748}"/>
               </a:ext>
             </a:extLst>
           </p:cNvPr>
@@ -5871,15 +5875,18 @@
             <p:ph type="title"/>
           </p:nvPr>
         </p:nvSpPr>
-        <p:spPr bwMode="auto"/>
-        <p:txBody>
-          <a:bodyPr/>
-          <a:lstStyle/>
-          <a:p>
-            <a:pPr>
-              <a:defRPr/>
-            </a:pPr>
-            <a:r>
+        <p:spPr bwMode="auto">
+          <a:xfrm>
+            <a:off x="838200" y="365125"/>
+            <a:ext cx="10515600" cy="1325563"/>
+          </a:xfrm>
+        </p:spPr>
+        <p:txBody>
+          <a:bodyPr/>
+          <a:lstStyle/>
+          <a:p>
+            <a:r>
+              <a:rPr lang="ru-RU" dirty="0"/>
               <a:t>Реализация интерфейса</a:t>
             </a:r>
           </a:p>
@@ -5887,248 +5894,117 @@
       </p:sp>
       <p:sp>
         <p:nvSpPr>
-          <p:cNvPr id="1977041740" name="Объект 6">
+          <p:cNvPr id="2" name="Номер слайда 1">
             <a:extLst>
               <a:ext uri="{FF2B5EF4-FFF2-40B4-BE49-F238E27FC236}">
-                <a16:creationId xmlns:a16="http://schemas.microsoft.com/office/drawing/2014/main" id="{CDA7C1EB-2229-44E9-9513-AC1DD4A5152A}"/>
+                <a16:creationId xmlns:a16="http://schemas.microsoft.com/office/drawing/2014/main" id="{0144C6F0-0739-CED4-38F2-E0A724C37DB4}"/>
               </a:ext>
             </a:extLst>
           </p:cNvPr>
           <p:cNvSpPr>
             <a:spLocks noGrp="1"/>
           </p:cNvSpPr>
+          <p:nvPr>
+            <p:ph type="sldNum" sz="quarter" idx="12"/>
+          </p:nvPr>
+        </p:nvSpPr>
+        <p:spPr>
+          <a:xfrm>
+            <a:off x="8610600" y="6356350"/>
+            <a:ext cx="2743200" cy="365125"/>
+          </a:xfrm>
+        </p:spPr>
+        <p:txBody>
+          <a:bodyPr/>
+          <a:lstStyle/>
+          <a:p>
+            <a:fld id="{08395586-F03A-48D1-94DF-16B239DF4FB5}" type="slidenum">
+              <a:rPr lang="ru-RU" smtClean="0"/>
+              <a:pPr/>
+              <a:t>11</a:t>
+            </a:fld>
+            <a:endParaRPr lang="ru-RU"/>
+          </a:p>
+        </p:txBody>
+      </p:sp>
+      <p:sp>
+        <p:nvSpPr>
+          <p:cNvPr id="8" name="Заголовок 1">
+            <a:extLst>
+              <a:ext uri="{FF2B5EF4-FFF2-40B4-BE49-F238E27FC236}">
+                <a16:creationId xmlns:a16="http://schemas.microsoft.com/office/drawing/2014/main" id="{C54B5618-1C5C-974D-9862-11414C6820C3}"/>
+              </a:ext>
+            </a:extLst>
+          </p:cNvPr>
+          <p:cNvSpPr txBox="1">
+            <a:spLocks/>
+          </p:cNvSpPr>
           <p:nvPr/>
         </p:nvSpPr>
         <p:spPr bwMode="auto">
           <a:xfrm>
-            <a:off x="9892084" y="2174990"/>
-            <a:ext cx="2136321" cy="841261"/>
+            <a:off x="7443517" y="1539594"/>
+            <a:ext cx="4616193" cy="2344249"/>
           </a:xfrm>
+          <a:prstGeom prst="rect">
+            <a:avLst/>
+          </a:prstGeom>
         </p:spPr>
         <p:txBody>
-          <a:bodyPr vertOverflow="overflow" horzOverflow="overflow" vert="horz" wrap="square" lIns="91440" tIns="45720" rIns="91440" bIns="45720" numCol="1" spcCol="0" rtlCol="0" fromWordArt="0" anchor="t" anchorCtr="0" forceAA="0" compatLnSpc="0">
-            <a:normAutofit fontScale="85000" lnSpcReduction="20000"/>
+          <a:bodyPr vert="horz" lIns="91440" tIns="45720" rIns="91440" bIns="45720" rtlCol="0" anchor="ctr">
+            <a:normAutofit/>
           </a:bodyPr>
           <a:lstStyle>
-            <a:lvl1pPr marL="228600" indent="-228600" algn="l" defTabSz="914400" rtl="0">
+            <a:lvl1pPr algn="l" defTabSz="914400" rtl="0">
               <a:lnSpc>
                 <a:spcPct val="90000"/>
               </a:lnSpc>
               <a:spcBef>
-                <a:spcPts val="997"/>
+                <a:spcPts val="0"/>
               </a:spcBef>
-              <a:buFont typeface="Arial"/>
-              <a:buChar char="•"/>
-              <a:defRPr sz="2800">
+              <a:buNone/>
+              <a:defRPr sz="4400">
                 <a:solidFill>
                   <a:schemeClr val="tx1"/>
                 </a:solidFill>
-                <a:latin typeface="+mn-lt"/>
-                <a:ea typeface="+mn-ea"/>
-                <a:cs typeface="+mn-cs"/>
+                <a:latin typeface="+mj-lt"/>
+                <a:ea typeface="+mj-ea"/>
+                <a:cs typeface="+mj-cs"/>
               </a:defRPr>
             </a:lvl1pPr>
-            <a:lvl2pPr marL="685800" indent="-228600" algn="l" defTabSz="914400" rtl="0">
-              <a:lnSpc>
-                <a:spcPct val="90000"/>
-              </a:lnSpc>
-              <a:spcBef>
-                <a:spcPts val="497"/>
-              </a:spcBef>
-              <a:buFont typeface="Arial"/>
-              <a:buChar char="•"/>
-              <a:defRPr sz="2400">
-                <a:solidFill>
-                  <a:schemeClr val="tx1"/>
-                </a:solidFill>
-                <a:latin typeface="+mn-lt"/>
-                <a:ea typeface="+mn-ea"/>
-                <a:cs typeface="+mn-cs"/>
-              </a:defRPr>
-            </a:lvl2pPr>
-            <a:lvl3pPr marL="1143000" indent="-228600" algn="l" defTabSz="914400" rtl="0">
-              <a:lnSpc>
-                <a:spcPct val="90000"/>
-              </a:lnSpc>
-              <a:spcBef>
-                <a:spcPts val="497"/>
-              </a:spcBef>
-              <a:buFont typeface="Arial"/>
-              <a:buChar char="•"/>
-              <a:defRPr sz="2000">
-                <a:solidFill>
-                  <a:schemeClr val="tx1"/>
-                </a:solidFill>
-                <a:latin typeface="+mn-lt"/>
-                <a:ea typeface="+mn-ea"/>
-                <a:cs typeface="+mn-cs"/>
-              </a:defRPr>
-            </a:lvl3pPr>
-            <a:lvl4pPr marL="1600200" indent="-228600" algn="l" defTabSz="914400" rtl="0">
-              <a:lnSpc>
-                <a:spcPct val="90000"/>
-              </a:lnSpc>
-              <a:spcBef>
-                <a:spcPts val="497"/>
-              </a:spcBef>
-              <a:buFont typeface="Arial"/>
-              <a:buChar char="•"/>
-              <a:defRPr sz="1800">
-                <a:solidFill>
-                  <a:schemeClr val="tx1"/>
-                </a:solidFill>
-                <a:latin typeface="+mn-lt"/>
-                <a:ea typeface="+mn-ea"/>
-                <a:cs typeface="+mn-cs"/>
-              </a:defRPr>
-            </a:lvl4pPr>
-            <a:lvl5pPr marL="2057400" indent="-228600" algn="l" defTabSz="914400" rtl="0">
-              <a:lnSpc>
-                <a:spcPct val="90000"/>
-              </a:lnSpc>
-              <a:spcBef>
-                <a:spcPts val="497"/>
-              </a:spcBef>
-              <a:buFont typeface="Arial"/>
-              <a:buChar char="•"/>
-              <a:defRPr sz="1800">
-                <a:solidFill>
-                  <a:schemeClr val="tx1"/>
-                </a:solidFill>
-                <a:latin typeface="+mn-lt"/>
-                <a:ea typeface="+mn-ea"/>
-                <a:cs typeface="+mn-cs"/>
-              </a:defRPr>
-            </a:lvl5pPr>
-            <a:lvl6pPr marL="2514597" indent="-228600" algn="l" defTabSz="914400" rtl="0">
-              <a:lnSpc>
-                <a:spcPct val="90000"/>
-              </a:lnSpc>
-              <a:spcBef>
-                <a:spcPts val="497"/>
-              </a:spcBef>
-              <a:buFont typeface="Arial"/>
-              <a:buChar char="•"/>
-              <a:defRPr sz="1800">
-                <a:solidFill>
-                  <a:schemeClr val="tx1"/>
-                </a:solidFill>
-                <a:latin typeface="+mn-lt"/>
-                <a:ea typeface="+mn-ea"/>
-                <a:cs typeface="+mn-cs"/>
-              </a:defRPr>
-            </a:lvl6pPr>
-            <a:lvl7pPr marL="2971800" indent="-228600" algn="l" defTabSz="914400" rtl="0">
-              <a:lnSpc>
-                <a:spcPct val="90000"/>
-              </a:lnSpc>
-              <a:spcBef>
-                <a:spcPts val="497"/>
-              </a:spcBef>
-              <a:buFont typeface="Arial"/>
-              <a:buChar char="•"/>
-              <a:defRPr sz="1800">
-                <a:solidFill>
-                  <a:schemeClr val="tx1"/>
-                </a:solidFill>
-                <a:latin typeface="+mn-lt"/>
-                <a:ea typeface="+mn-ea"/>
-                <a:cs typeface="+mn-cs"/>
-              </a:defRPr>
-            </a:lvl7pPr>
-            <a:lvl8pPr marL="3429000" indent="-228600" algn="l" defTabSz="914400" rtl="0">
-              <a:lnSpc>
-                <a:spcPct val="90000"/>
-              </a:lnSpc>
-              <a:spcBef>
-                <a:spcPts val="497"/>
-              </a:spcBef>
-              <a:buFont typeface="Arial"/>
-              <a:buChar char="•"/>
-              <a:defRPr sz="1800">
-                <a:solidFill>
-                  <a:schemeClr val="tx1"/>
-                </a:solidFill>
-                <a:latin typeface="+mn-lt"/>
-                <a:ea typeface="+mn-ea"/>
-                <a:cs typeface="+mn-cs"/>
-              </a:defRPr>
-            </a:lvl8pPr>
-            <a:lvl9pPr marL="3886200" indent="-228600" algn="l" defTabSz="914400" rtl="0">
-              <a:lnSpc>
-                <a:spcPct val="90000"/>
-              </a:lnSpc>
-              <a:spcBef>
-                <a:spcPts val="497"/>
-              </a:spcBef>
-              <a:buFont typeface="Arial"/>
-              <a:buChar char="•"/>
-              <a:defRPr sz="1800">
-                <a:solidFill>
-                  <a:schemeClr val="tx1"/>
-                </a:solidFill>
-                <a:latin typeface="+mn-lt"/>
-                <a:ea typeface="+mn-ea"/>
-                <a:cs typeface="+mn-cs"/>
-              </a:defRPr>
-            </a:lvl9pPr>
           </a:lstStyle>
           <a:p>
-            <a:pPr marL="0" indent="0" algn="ctr">
-              <a:buFont typeface="Arial"/>
-              <a:buNone/>
-              <a:defRPr/>
-            </a:pPr>
-            <a:r>
-              <a:rPr lang="ru-RU" sz="2800" dirty="0"/>
-              <a:t>Экран </a:t>
-            </a:r>
-            <a:r>
-              <a:rPr lang="ru-RU" dirty="0"/>
-              <a:t>источника данных</a:t>
-            </a:r>
-            <a:endParaRPr sz="2800" dirty="0"/>
-          </a:p>
-        </p:txBody>
-      </p:sp>
-      <p:sp>
-        <p:nvSpPr>
-          <p:cNvPr id="2" name="Номер слайда 1">
+            <a:pPr>
+              <a:defRPr/>
+            </a:pPr>
+            <a:r>
+              <a:rPr lang="ru-RU" sz="3200" dirty="0"/>
+              <a:t>1. Экран сохранения закладки</a:t>
+            </a:r>
+          </a:p>
+          <a:p>
+            <a:pPr>
+              <a:defRPr/>
+            </a:pPr>
+            <a:endParaRPr lang="ru-RU" sz="3200" dirty="0"/>
+          </a:p>
+          <a:p>
+            <a:pPr>
+              <a:defRPr/>
+            </a:pPr>
+            <a:r>
+              <a:rPr lang="ru-RU" sz="3200" dirty="0"/>
+              <a:t>2. Экран сохранённого расписания</a:t>
+            </a:r>
+          </a:p>
+        </p:txBody>
+      </p:sp>
+      <p:pic>
+        <p:nvPicPr>
+          <p:cNvPr id="5" name="Рисунок 4">
             <a:extLst>
               <a:ext uri="{FF2B5EF4-FFF2-40B4-BE49-F238E27FC236}">
-                <a16:creationId xmlns:a16="http://schemas.microsoft.com/office/drawing/2014/main" id="{19777E2E-705B-1FBD-B4EC-9FE9D32F9035}"/>
-              </a:ext>
-            </a:extLst>
-          </p:cNvPr>
-          <p:cNvSpPr>
-            <a:spLocks noGrp="1"/>
-          </p:cNvSpPr>
-          <p:nvPr>
-            <p:ph type="sldNum" sz="quarter" idx="12"/>
-          </p:nvPr>
-        </p:nvSpPr>
-        <p:spPr/>
-        <p:txBody>
-          <a:bodyPr/>
-          <a:lstStyle/>
-          <a:p>
-            <a:pPr>
-              <a:defRPr/>
-            </a:pPr>
-            <a:fld id="{08395586-F03A-48D1-94DF-16B239DF4FB5}" type="slidenum">
-              <a:rPr lang="ru-RU" smtClean="0"/>
-              <a:t>11</a:t>
-            </a:fld>
-            <a:endParaRPr lang="ru-RU"/>
-          </a:p>
-        </p:txBody>
-      </p:sp>
-      <p:pic>
-        <p:nvPicPr>
-          <p:cNvPr id="4" name="Рисунок 3">
-            <a:extLst>
-              <a:ext uri="{FF2B5EF4-FFF2-40B4-BE49-F238E27FC236}">
-                <a16:creationId xmlns:a16="http://schemas.microsoft.com/office/drawing/2014/main" id="{1DE1273A-CB91-D5C7-83C0-C0B467189108}"/>
+                <a16:creationId xmlns:a16="http://schemas.microsoft.com/office/drawing/2014/main" id="{84F18820-9073-5733-9D7D-5728D1C48B55}"/>
               </a:ext>
             </a:extLst>
           </p:cNvPr>
@@ -6152,8 +6028,8 @@
         </p:blipFill>
         <p:spPr bwMode="auto">
           <a:xfrm>
-            <a:off x="2658389" y="1690688"/>
-            <a:ext cx="2430661" cy="4938878"/>
+            <a:off x="974043" y="1539594"/>
+            <a:ext cx="2594841" cy="5273422"/>
           </a:xfrm>
           <a:prstGeom prst="rect">
             <a:avLst/>
@@ -6164,214 +6040,12 @@
           </a:ln>
         </p:spPr>
       </p:pic>
-      <p:sp>
-        <p:nvSpPr>
-          <p:cNvPr id="5" name="Объект 6">
+      <p:pic>
+        <p:nvPicPr>
+          <p:cNvPr id="7" name="Рисунок 6">
             <a:extLst>
               <a:ext uri="{FF2B5EF4-FFF2-40B4-BE49-F238E27FC236}">
-                <a16:creationId xmlns:a16="http://schemas.microsoft.com/office/drawing/2014/main" id="{51E60A27-723C-D365-0F74-2D210DF7AA1C}"/>
-              </a:ext>
-            </a:extLst>
-          </p:cNvPr>
-          <p:cNvSpPr>
-            <a:spLocks noGrp="1"/>
-          </p:cNvSpPr>
-          <p:nvPr/>
-        </p:nvSpPr>
-        <p:spPr bwMode="auto">
-          <a:xfrm>
-            <a:off x="404567" y="2161317"/>
-            <a:ext cx="2136321" cy="841261"/>
-          </a:xfrm>
-        </p:spPr>
-        <p:txBody>
-          <a:bodyPr vertOverflow="overflow" horzOverflow="overflow" vert="horz" wrap="square" lIns="91440" tIns="45720" rIns="91440" bIns="45720" numCol="1" spcCol="0" rtlCol="0" fromWordArt="0" anchor="t" anchorCtr="0" forceAA="0" compatLnSpc="0">
-            <a:normAutofit fontScale="85000" lnSpcReduction="20000"/>
-          </a:bodyPr>
-          <a:lstStyle>
-            <a:lvl1pPr marL="228600" indent="-228600" algn="l" defTabSz="914400" rtl="0">
-              <a:lnSpc>
-                <a:spcPct val="90000"/>
-              </a:lnSpc>
-              <a:spcBef>
-                <a:spcPts val="997"/>
-              </a:spcBef>
-              <a:buFont typeface="Arial"/>
-              <a:buChar char="•"/>
-              <a:defRPr sz="2800">
-                <a:solidFill>
-                  <a:schemeClr val="tx1"/>
-                </a:solidFill>
-                <a:latin typeface="+mn-lt"/>
-                <a:ea typeface="+mn-ea"/>
-                <a:cs typeface="+mn-cs"/>
-              </a:defRPr>
-            </a:lvl1pPr>
-            <a:lvl2pPr marL="685800" indent="-228600" algn="l" defTabSz="914400" rtl="0">
-              <a:lnSpc>
-                <a:spcPct val="90000"/>
-              </a:lnSpc>
-              <a:spcBef>
-                <a:spcPts val="497"/>
-              </a:spcBef>
-              <a:buFont typeface="Arial"/>
-              <a:buChar char="•"/>
-              <a:defRPr sz="2400">
-                <a:solidFill>
-                  <a:schemeClr val="tx1"/>
-                </a:solidFill>
-                <a:latin typeface="+mn-lt"/>
-                <a:ea typeface="+mn-ea"/>
-                <a:cs typeface="+mn-cs"/>
-              </a:defRPr>
-            </a:lvl2pPr>
-            <a:lvl3pPr marL="1143000" indent="-228600" algn="l" defTabSz="914400" rtl="0">
-              <a:lnSpc>
-                <a:spcPct val="90000"/>
-              </a:lnSpc>
-              <a:spcBef>
-                <a:spcPts val="497"/>
-              </a:spcBef>
-              <a:buFont typeface="Arial"/>
-              <a:buChar char="•"/>
-              <a:defRPr sz="2000">
-                <a:solidFill>
-                  <a:schemeClr val="tx1"/>
-                </a:solidFill>
-                <a:latin typeface="+mn-lt"/>
-                <a:ea typeface="+mn-ea"/>
-                <a:cs typeface="+mn-cs"/>
-              </a:defRPr>
-            </a:lvl3pPr>
-            <a:lvl4pPr marL="1600200" indent="-228600" algn="l" defTabSz="914400" rtl="0">
-              <a:lnSpc>
-                <a:spcPct val="90000"/>
-              </a:lnSpc>
-              <a:spcBef>
-                <a:spcPts val="497"/>
-              </a:spcBef>
-              <a:buFont typeface="Arial"/>
-              <a:buChar char="•"/>
-              <a:defRPr sz="1800">
-                <a:solidFill>
-                  <a:schemeClr val="tx1"/>
-                </a:solidFill>
-                <a:latin typeface="+mn-lt"/>
-                <a:ea typeface="+mn-ea"/>
-                <a:cs typeface="+mn-cs"/>
-              </a:defRPr>
-            </a:lvl4pPr>
-            <a:lvl5pPr marL="2057400" indent="-228600" algn="l" defTabSz="914400" rtl="0">
-              <a:lnSpc>
-                <a:spcPct val="90000"/>
-              </a:lnSpc>
-              <a:spcBef>
-                <a:spcPts val="497"/>
-              </a:spcBef>
-              <a:buFont typeface="Arial"/>
-              <a:buChar char="•"/>
-              <a:defRPr sz="1800">
-                <a:solidFill>
-                  <a:schemeClr val="tx1"/>
-                </a:solidFill>
-                <a:latin typeface="+mn-lt"/>
-                <a:ea typeface="+mn-ea"/>
-                <a:cs typeface="+mn-cs"/>
-              </a:defRPr>
-            </a:lvl5pPr>
-            <a:lvl6pPr marL="2514597" indent="-228600" algn="l" defTabSz="914400" rtl="0">
-              <a:lnSpc>
-                <a:spcPct val="90000"/>
-              </a:lnSpc>
-              <a:spcBef>
-                <a:spcPts val="497"/>
-              </a:spcBef>
-              <a:buFont typeface="Arial"/>
-              <a:buChar char="•"/>
-              <a:defRPr sz="1800">
-                <a:solidFill>
-                  <a:schemeClr val="tx1"/>
-                </a:solidFill>
-                <a:latin typeface="+mn-lt"/>
-                <a:ea typeface="+mn-ea"/>
-                <a:cs typeface="+mn-cs"/>
-              </a:defRPr>
-            </a:lvl6pPr>
-            <a:lvl7pPr marL="2971800" indent="-228600" algn="l" defTabSz="914400" rtl="0">
-              <a:lnSpc>
-                <a:spcPct val="90000"/>
-              </a:lnSpc>
-              <a:spcBef>
-                <a:spcPts val="497"/>
-              </a:spcBef>
-              <a:buFont typeface="Arial"/>
-              <a:buChar char="•"/>
-              <a:defRPr sz="1800">
-                <a:solidFill>
-                  <a:schemeClr val="tx1"/>
-                </a:solidFill>
-                <a:latin typeface="+mn-lt"/>
-                <a:ea typeface="+mn-ea"/>
-                <a:cs typeface="+mn-cs"/>
-              </a:defRPr>
-            </a:lvl7pPr>
-            <a:lvl8pPr marL="3429000" indent="-228600" algn="l" defTabSz="914400" rtl="0">
-              <a:lnSpc>
-                <a:spcPct val="90000"/>
-              </a:lnSpc>
-              <a:spcBef>
-                <a:spcPts val="497"/>
-              </a:spcBef>
-              <a:buFont typeface="Arial"/>
-              <a:buChar char="•"/>
-              <a:defRPr sz="1800">
-                <a:solidFill>
-                  <a:schemeClr val="tx1"/>
-                </a:solidFill>
-                <a:latin typeface="+mn-lt"/>
-                <a:ea typeface="+mn-ea"/>
-                <a:cs typeface="+mn-cs"/>
-              </a:defRPr>
-            </a:lvl8pPr>
-            <a:lvl9pPr marL="3886200" indent="-228600" algn="l" defTabSz="914400" rtl="0">
-              <a:lnSpc>
-                <a:spcPct val="90000"/>
-              </a:lnSpc>
-              <a:spcBef>
-                <a:spcPts val="497"/>
-              </a:spcBef>
-              <a:buFont typeface="Arial"/>
-              <a:buChar char="•"/>
-              <a:defRPr sz="1800">
-                <a:solidFill>
-                  <a:schemeClr val="tx1"/>
-                </a:solidFill>
-                <a:latin typeface="+mn-lt"/>
-                <a:ea typeface="+mn-ea"/>
-                <a:cs typeface="+mn-cs"/>
-              </a:defRPr>
-            </a:lvl9pPr>
-          </a:lstStyle>
-          <a:p>
-            <a:pPr marL="0" indent="0" algn="ctr">
-              <a:buFont typeface="Arial"/>
-              <a:buNone/>
-              <a:defRPr/>
-            </a:pPr>
-            <a:r>
-              <a:rPr lang="ru-RU" sz="2800" dirty="0"/>
-              <a:t>Левое боковое меню</a:t>
-            </a:r>
-            <a:endParaRPr sz="2800" dirty="0"/>
-          </a:p>
-        </p:txBody>
-      </p:sp>
-      <p:pic>
-        <p:nvPicPr>
-          <p:cNvPr id="6" name="Рисунок 5">
-            <a:extLst>
-              <a:ext uri="{FF2B5EF4-FFF2-40B4-BE49-F238E27FC236}">
-                <a16:creationId xmlns:a16="http://schemas.microsoft.com/office/drawing/2014/main" id="{3B404BDC-BE88-A738-EDB1-0DF792BC745D}"/>
+                <a16:creationId xmlns:a16="http://schemas.microsoft.com/office/drawing/2014/main" id="{E7E9DFB0-9447-0401-5EEF-8955962CEA3F}"/>
               </a:ext>
             </a:extLst>
           </p:cNvPr>
@@ -6395,8 +6069,8 @@
         </p:blipFill>
         <p:spPr bwMode="auto">
           <a:xfrm>
-            <a:off x="7461850" y="1690688"/>
-            <a:ext cx="2430234" cy="4938879"/>
+            <a:off x="4274794" y="1560123"/>
+            <a:ext cx="2595103" cy="5273422"/>
           </a:xfrm>
           <a:prstGeom prst="rect">
             <a:avLst/>
@@ -6410,7 +6084,7 @@
     </p:spTree>
     <p:extLst>
       <p:ext uri="{BB962C8B-B14F-4D97-AF65-F5344CB8AC3E}">
-        <p14:creationId xmlns:p14="http://schemas.microsoft.com/office/powerpoint/2010/main" val="2672147057"/>
+        <p14:creationId xmlns:p14="http://schemas.microsoft.com/office/powerpoint/2010/main" val="2992545097"/>
       </p:ext>
     </p:extLst>
   </p:cSld>
@@ -6422,6 +6096,265 @@
 </file>
 
 <file path=ppt/slides/slide12.xml><?xml version="1.0" encoding="utf-8"?>
+<p:sld xmlns:a="http://schemas.openxmlformats.org/drawingml/2006/main" xmlns:r="http://schemas.openxmlformats.org/officeDocument/2006/relationships" xmlns:p="http://schemas.openxmlformats.org/presentationml/2006/main" showMasterPhAnim="0">
+  <p:cSld>
+    <p:spTree>
+      <p:nvGrpSpPr>
+        <p:cNvPr id="1" name="">
+          <a:extLst>
+            <a:ext uri="{FF2B5EF4-FFF2-40B4-BE49-F238E27FC236}">
+              <a16:creationId xmlns:a16="http://schemas.microsoft.com/office/drawing/2014/main" id="{9CB05986-8AD6-80EE-DCE6-77AE0FAB17F1}"/>
+            </a:ext>
+          </a:extLst>
+        </p:cNvPr>
+        <p:cNvGrpSpPr/>
+        <p:nvPr/>
+      </p:nvGrpSpPr>
+      <p:grpSpPr bwMode="auto">
+        <a:xfrm>
+          <a:off x="0" y="0"/>
+          <a:ext cx="0" cy="0"/>
+          <a:chOff x="0" y="0"/>
+          <a:chExt cx="0" cy="0"/>
+        </a:xfrm>
+      </p:grpSpPr>
+      <p:sp>
+        <p:nvSpPr>
+          <p:cNvPr id="210375120" name="Заголовок 1">
+            <a:extLst>
+              <a:ext uri="{FF2B5EF4-FFF2-40B4-BE49-F238E27FC236}">
+                <a16:creationId xmlns:a16="http://schemas.microsoft.com/office/drawing/2014/main" id="{3D1FDCDE-BBB2-5577-1F3C-402C420802E6}"/>
+              </a:ext>
+            </a:extLst>
+          </p:cNvPr>
+          <p:cNvSpPr>
+            <a:spLocks noGrp="1"/>
+          </p:cNvSpPr>
+          <p:nvPr>
+            <p:ph type="title"/>
+          </p:nvPr>
+        </p:nvSpPr>
+        <p:spPr bwMode="auto">
+          <a:xfrm>
+            <a:off x="838200" y="365125"/>
+            <a:ext cx="10515600" cy="1325563"/>
+          </a:xfrm>
+        </p:spPr>
+        <p:txBody>
+          <a:bodyPr/>
+          <a:lstStyle/>
+          <a:p>
+            <a:r>
+              <a:rPr lang="ru-RU" dirty="0"/>
+              <a:t>Реализация интерфейса</a:t>
+            </a:r>
+          </a:p>
+        </p:txBody>
+      </p:sp>
+      <p:sp>
+        <p:nvSpPr>
+          <p:cNvPr id="2" name="Номер слайда 1">
+            <a:extLst>
+              <a:ext uri="{FF2B5EF4-FFF2-40B4-BE49-F238E27FC236}">
+                <a16:creationId xmlns:a16="http://schemas.microsoft.com/office/drawing/2014/main" id="{A068D9B5-0EAC-485F-AF5A-AFFF32925715}"/>
+              </a:ext>
+            </a:extLst>
+          </p:cNvPr>
+          <p:cNvSpPr>
+            <a:spLocks noGrp="1"/>
+          </p:cNvSpPr>
+          <p:nvPr>
+            <p:ph type="sldNum" sz="quarter" idx="12"/>
+          </p:nvPr>
+        </p:nvSpPr>
+        <p:spPr>
+          <a:xfrm>
+            <a:off x="8610600" y="6356350"/>
+            <a:ext cx="2743200" cy="365125"/>
+          </a:xfrm>
+        </p:spPr>
+        <p:txBody>
+          <a:bodyPr/>
+          <a:lstStyle/>
+          <a:p>
+            <a:fld id="{08395586-F03A-48D1-94DF-16B239DF4FB5}" type="slidenum">
+              <a:rPr lang="ru-RU" smtClean="0"/>
+              <a:pPr/>
+              <a:t>12</a:t>
+            </a:fld>
+            <a:endParaRPr lang="ru-RU"/>
+          </a:p>
+        </p:txBody>
+      </p:sp>
+      <p:sp>
+        <p:nvSpPr>
+          <p:cNvPr id="8" name="Заголовок 1">
+            <a:extLst>
+              <a:ext uri="{FF2B5EF4-FFF2-40B4-BE49-F238E27FC236}">
+                <a16:creationId xmlns:a16="http://schemas.microsoft.com/office/drawing/2014/main" id="{8B9E2DDA-04D1-8B09-8BFA-D36EEF89252B}"/>
+              </a:ext>
+            </a:extLst>
+          </p:cNvPr>
+          <p:cNvSpPr txBox="1">
+            <a:spLocks/>
+          </p:cNvSpPr>
+          <p:nvPr/>
+        </p:nvSpPr>
+        <p:spPr bwMode="auto">
+          <a:xfrm>
+            <a:off x="7443517" y="1539595"/>
+            <a:ext cx="4616193" cy="1957750"/>
+          </a:xfrm>
+          <a:prstGeom prst="rect">
+            <a:avLst/>
+          </a:prstGeom>
+        </p:spPr>
+        <p:txBody>
+          <a:bodyPr vert="horz" lIns="91440" tIns="45720" rIns="91440" bIns="45720" rtlCol="0" anchor="ctr">
+            <a:normAutofit/>
+          </a:bodyPr>
+          <a:lstStyle>
+            <a:lvl1pPr algn="l" defTabSz="914400" rtl="0">
+              <a:lnSpc>
+                <a:spcPct val="90000"/>
+              </a:lnSpc>
+              <a:spcBef>
+                <a:spcPts val="0"/>
+              </a:spcBef>
+              <a:buNone/>
+              <a:defRPr sz="4400">
+                <a:solidFill>
+                  <a:schemeClr val="tx1"/>
+                </a:solidFill>
+                <a:latin typeface="+mj-lt"/>
+                <a:ea typeface="+mj-ea"/>
+                <a:cs typeface="+mj-cs"/>
+              </a:defRPr>
+            </a:lvl1pPr>
+          </a:lstStyle>
+          <a:p>
+            <a:pPr>
+              <a:defRPr/>
+            </a:pPr>
+            <a:r>
+              <a:rPr lang="ru-RU" sz="3200" dirty="0"/>
+              <a:t>1. Левое боковое меню</a:t>
+            </a:r>
+          </a:p>
+          <a:p>
+            <a:pPr>
+              <a:defRPr/>
+            </a:pPr>
+            <a:endParaRPr lang="ru-RU" sz="3200" dirty="0"/>
+          </a:p>
+          <a:p>
+            <a:pPr>
+              <a:defRPr/>
+            </a:pPr>
+            <a:r>
+              <a:rPr lang="ru-RU" sz="3200" dirty="0"/>
+              <a:t>2. Экран источника данных</a:t>
+            </a:r>
+          </a:p>
+        </p:txBody>
+      </p:sp>
+      <p:pic>
+        <p:nvPicPr>
+          <p:cNvPr id="4" name="Рисунок 3">
+            <a:extLst>
+              <a:ext uri="{FF2B5EF4-FFF2-40B4-BE49-F238E27FC236}">
+                <a16:creationId xmlns:a16="http://schemas.microsoft.com/office/drawing/2014/main" id="{9B693482-96D6-8213-9E72-0369F92594C7}"/>
+              </a:ext>
+            </a:extLst>
+          </p:cNvPr>
+          <p:cNvPicPr>
+            <a:picLocks noChangeAspect="1"/>
+          </p:cNvPicPr>
+          <p:nvPr/>
+        </p:nvPicPr>
+        <p:blipFill>
+          <a:blip r:embed="rId3" cstate="print">
+            <a:extLst>
+              <a:ext uri="{28A0092B-C50C-407E-A947-70E740481C1C}">
+                <a14:useLocalDpi xmlns:a14="http://schemas.microsoft.com/office/drawing/2010/main" val="0"/>
+              </a:ext>
+            </a:extLst>
+          </a:blip>
+          <a:srcRect/>
+          <a:stretch>
+            <a:fillRect/>
+          </a:stretch>
+        </p:blipFill>
+        <p:spPr bwMode="auto">
+          <a:xfrm>
+            <a:off x="973783" y="1540009"/>
+            <a:ext cx="2595102" cy="5273007"/>
+          </a:xfrm>
+          <a:prstGeom prst="rect">
+            <a:avLst/>
+          </a:prstGeom>
+          <a:noFill/>
+          <a:ln>
+            <a:noFill/>
+          </a:ln>
+        </p:spPr>
+      </p:pic>
+      <p:pic>
+        <p:nvPicPr>
+          <p:cNvPr id="9" name="Рисунок 8">
+            <a:extLst>
+              <a:ext uri="{FF2B5EF4-FFF2-40B4-BE49-F238E27FC236}">
+                <a16:creationId xmlns:a16="http://schemas.microsoft.com/office/drawing/2014/main" id="{26D1DBA0-0B06-3173-5021-4608E597DBA6}"/>
+              </a:ext>
+            </a:extLst>
+          </p:cNvPr>
+          <p:cNvPicPr>
+            <a:picLocks noChangeAspect="1"/>
+          </p:cNvPicPr>
+          <p:nvPr/>
+        </p:nvPicPr>
+        <p:blipFill>
+          <a:blip r:embed="rId4" cstate="print">
+            <a:extLst>
+              <a:ext uri="{28A0092B-C50C-407E-A947-70E740481C1C}">
+                <a14:useLocalDpi xmlns:a14="http://schemas.microsoft.com/office/drawing/2010/main" val="0"/>
+              </a:ext>
+            </a:extLst>
+          </a:blip>
+          <a:srcRect/>
+          <a:stretch>
+            <a:fillRect/>
+          </a:stretch>
+        </p:blipFill>
+        <p:spPr bwMode="auto">
+          <a:xfrm>
+            <a:off x="4274795" y="1539083"/>
+            <a:ext cx="2595102" cy="5273934"/>
+          </a:xfrm>
+          <a:prstGeom prst="rect">
+            <a:avLst/>
+          </a:prstGeom>
+          <a:noFill/>
+          <a:ln>
+            <a:noFill/>
+          </a:ln>
+        </p:spPr>
+      </p:pic>
+    </p:spTree>
+    <p:extLst>
+      <p:ext uri="{BB962C8B-B14F-4D97-AF65-F5344CB8AC3E}">
+        <p14:creationId xmlns:p14="http://schemas.microsoft.com/office/powerpoint/2010/main" val="2246991566"/>
+      </p:ext>
+    </p:extLst>
+  </p:cSld>
+  <p:clrMapOvr>
+    <a:masterClrMapping/>
+  </p:clrMapOvr>
+  <p:transition/>
+</p:sld>
+</file>
+
+<file path=ppt/slides/slide13.xml><?xml version="1.0" encoding="utf-8"?>
 <p:sld xmlns:a="http://schemas.openxmlformats.org/drawingml/2006/main" xmlns:r="http://schemas.openxmlformats.org/officeDocument/2006/relationships" xmlns:p="http://schemas.openxmlformats.org/presentationml/2006/main" showMasterPhAnim="0">
   <p:cSld>
     <p:spTree>
@@ -6687,7 +6620,7 @@
             </a:pPr>
             <a:fld id="{08395586-F03A-48D1-94DF-16B239DF4FB5}" type="slidenum">
               <a:rPr lang="ru-RU" smtClean="0"/>
-              <a:t>12</a:t>
+              <a:t>13</a:t>
             </a:fld>
             <a:endParaRPr lang="ru-RU"/>
           </a:p>
@@ -6706,6 +6639,679 @@
       <p:transition advClick="1"/>
     </mc:Fallback>
   </mc:AlternateContent>
+</p:sld>
+</file>
+
+<file path=ppt/slides/slide14.xml><?xml version="1.0" encoding="utf-8"?>
+<p:sld xmlns:a="http://schemas.openxmlformats.org/drawingml/2006/main" xmlns:r="http://schemas.openxmlformats.org/officeDocument/2006/relationships" xmlns:p="http://schemas.openxmlformats.org/presentationml/2006/main" showMasterPhAnim="0">
+  <p:cSld>
+    <p:spTree>
+      <p:nvGrpSpPr>
+        <p:cNvPr id="1" name="">
+          <a:extLst>
+            <a:ext uri="{FF2B5EF4-FFF2-40B4-BE49-F238E27FC236}">
+              <a16:creationId xmlns:a16="http://schemas.microsoft.com/office/drawing/2014/main" id="{69D7792E-A9D6-9782-57CA-835774DD1F0D}"/>
+            </a:ext>
+          </a:extLst>
+        </p:cNvPr>
+        <p:cNvGrpSpPr/>
+        <p:nvPr/>
+      </p:nvGrpSpPr>
+      <p:grpSpPr bwMode="auto">
+        <a:xfrm>
+          <a:off x="0" y="0"/>
+          <a:ext cx="0" cy="0"/>
+          <a:chOff x="0" y="0"/>
+          <a:chExt cx="0" cy="0"/>
+        </a:xfrm>
+      </p:grpSpPr>
+      <p:sp>
+        <p:nvSpPr>
+          <p:cNvPr id="985819847" name="Title 1">
+            <a:extLst>
+              <a:ext uri="{FF2B5EF4-FFF2-40B4-BE49-F238E27FC236}">
+                <a16:creationId xmlns:a16="http://schemas.microsoft.com/office/drawing/2014/main" id="{E484214B-CD5F-09B7-33A4-FCF17EE2F387}"/>
+              </a:ext>
+            </a:extLst>
+          </p:cNvPr>
+          <p:cNvSpPr>
+            <a:spLocks noGrp="1"/>
+          </p:cNvSpPr>
+          <p:nvPr>
+            <p:ph type="ctrTitle"/>
+          </p:nvPr>
+        </p:nvSpPr>
+        <p:spPr bwMode="auto">
+          <a:xfrm>
+            <a:off x="1523998" y="3429000"/>
+            <a:ext cx="9144000" cy="1136643"/>
+          </a:xfrm>
+        </p:spPr>
+        <p:txBody>
+          <a:bodyPr vertOverflow="overflow" horzOverflow="overflow" vert="horz" wrap="square" lIns="91440" tIns="45720" rIns="91440" bIns="45720" numCol="1" spcCol="0" rtlCol="0" fromWordArt="0" anchor="b" anchorCtr="0" forceAA="0" compatLnSpc="0">
+            <a:normAutofit/>
+          </a:bodyPr>
+          <a:lstStyle/>
+          <a:p>
+            <a:pPr>
+              <a:defRPr/>
+            </a:pPr>
+            <a:r>
+              <a:rPr lang="ru-RU" sz="2400" b="0" i="0" u="none" strike="noStrike" cap="none" spc="0" dirty="0">
+                <a:solidFill>
+                  <a:schemeClr val="tx1"/>
+                </a:solidFill>
+                <a:latin typeface="Arial"/>
+                <a:ea typeface="Arial"/>
+                <a:cs typeface="Arial"/>
+              </a:rPr>
+              <a:t>Разработка мобильного</a:t>
+            </a:r>
+            <a:r>
+              <a:rPr lang="en-US" sz="2400" b="0" i="0" u="none" strike="noStrike" cap="none" spc="0" dirty="0">
+                <a:solidFill>
+                  <a:schemeClr val="tx1"/>
+                </a:solidFill>
+                <a:latin typeface="Arial"/>
+                <a:ea typeface="Arial"/>
+                <a:cs typeface="Arial"/>
+              </a:rPr>
+              <a:t> </a:t>
+            </a:r>
+            <a:r>
+              <a:rPr lang="ru-RU" sz="2400" b="0" i="0" u="none" strike="noStrike" cap="none" spc="0" dirty="0">
+                <a:solidFill>
+                  <a:schemeClr val="tx1"/>
+                </a:solidFill>
+                <a:latin typeface="Arial"/>
+                <a:ea typeface="Arial"/>
+                <a:cs typeface="Arial"/>
+              </a:rPr>
+              <a:t>приложения «</a:t>
+            </a:r>
+            <a:r>
+              <a:rPr lang="en-US" sz="2400" b="0" i="0" u="none" strike="noStrike" cap="none" spc="0" dirty="0">
+                <a:solidFill>
+                  <a:schemeClr val="tx1"/>
+                </a:solidFill>
+                <a:latin typeface="Arial"/>
+                <a:ea typeface="Arial"/>
+                <a:cs typeface="Arial"/>
+              </a:rPr>
+              <a:t>CS Schedule</a:t>
+            </a:r>
+            <a:r>
+              <a:rPr lang="ru-RU" sz="2400" b="0" i="0" u="none" strike="noStrike" cap="none" spc="0" dirty="0">
+                <a:solidFill>
+                  <a:schemeClr val="tx1"/>
+                </a:solidFill>
+                <a:latin typeface="Arial"/>
+                <a:ea typeface="Arial"/>
+                <a:cs typeface="Arial"/>
+              </a:rPr>
+              <a:t>»</a:t>
+            </a:r>
+            <a:endParaRPr lang="ru-RU" dirty="0"/>
+          </a:p>
+        </p:txBody>
+      </p:sp>
+      <p:sp>
+        <p:nvSpPr>
+          <p:cNvPr id="291382556" name="Subtitle 2">
+            <a:extLst>
+              <a:ext uri="{FF2B5EF4-FFF2-40B4-BE49-F238E27FC236}">
+                <a16:creationId xmlns:a16="http://schemas.microsoft.com/office/drawing/2014/main" id="{13554D30-5B39-9752-B4E0-A66836CE7320}"/>
+              </a:ext>
+            </a:extLst>
+          </p:cNvPr>
+          <p:cNvSpPr>
+            <a:spLocks noGrp="1"/>
+          </p:cNvSpPr>
+          <p:nvPr>
+            <p:ph type="subTitle" idx="1"/>
+          </p:nvPr>
+        </p:nvSpPr>
+        <p:spPr bwMode="auto">
+          <a:xfrm>
+            <a:off x="5594099" y="5436925"/>
+            <a:ext cx="6493793" cy="1255709"/>
+          </a:xfrm>
+        </p:spPr>
+        <p:txBody>
+          <a:bodyPr vertOverflow="overflow" horzOverflow="overflow" vert="horz" wrap="square" lIns="91440" tIns="45720" rIns="91440" bIns="45720" numCol="1" spcCol="0" rtlCol="0" fromWordArt="0" anchor="t" anchorCtr="0" forceAA="0" compatLnSpc="0">
+            <a:normAutofit fontScale="90000" lnSpcReduction="2000"/>
+          </a:bodyPr>
+          <a:lstStyle/>
+          <a:p>
+            <a:pPr algn="l">
+              <a:defRPr/>
+            </a:pPr>
+            <a:r>
+              <a:rPr lang="ru-RU" sz="2000" b="0" i="0" u="none" strike="noStrike" cap="none" spc="0" dirty="0">
+                <a:solidFill>
+                  <a:schemeClr val="tx1"/>
+                </a:solidFill>
+                <a:latin typeface="Arial"/>
+                <a:ea typeface="Arial"/>
+                <a:cs typeface="Arial"/>
+              </a:rPr>
+              <a:t>Научный руководитель: Тарасов В.С.</a:t>
+            </a:r>
+            <a:r>
+              <a:rPr lang="en-US" sz="2000" b="0" i="0" u="none" strike="noStrike" cap="none" spc="0" dirty="0">
+                <a:solidFill>
+                  <a:schemeClr val="tx1"/>
+                </a:solidFill>
+                <a:latin typeface="Arial"/>
+                <a:ea typeface="Arial"/>
+                <a:cs typeface="Arial"/>
+              </a:rPr>
+              <a:t> </a:t>
+            </a:r>
+            <a:r>
+              <a:rPr lang="ru-RU" sz="2000" b="0" i="0" u="none" strike="noStrike" cap="none" spc="0" dirty="0">
+                <a:solidFill>
+                  <a:schemeClr val="tx1"/>
+                </a:solidFill>
+                <a:latin typeface="Arial"/>
+                <a:ea typeface="Arial"/>
+                <a:cs typeface="Arial"/>
+              </a:rPr>
+              <a:t>ст. преподаватель</a:t>
+            </a:r>
+            <a:endParaRPr sz="2000" b="0" i="0" u="none" strike="noStrike" cap="none" spc="0" dirty="0">
+              <a:solidFill>
+                <a:schemeClr val="tx1"/>
+              </a:solidFill>
+              <a:latin typeface="Times New Roman"/>
+              <a:cs typeface="Times New Roman"/>
+            </a:endParaRPr>
+          </a:p>
+          <a:p>
+            <a:pPr algn="l">
+              <a:defRPr/>
+            </a:pPr>
+            <a:r>
+              <a:rPr lang="ru-RU" sz="2000" b="0" i="0" u="none" strike="noStrike" cap="none" spc="0" dirty="0">
+                <a:solidFill>
+                  <a:schemeClr val="tx1"/>
+                </a:solidFill>
+                <a:latin typeface="Arial"/>
+                <a:ea typeface="Arial"/>
+                <a:cs typeface="Arial"/>
+              </a:rPr>
+              <a:t>Консультант: Ушаков В.А. ассистент</a:t>
+            </a:r>
+          </a:p>
+          <a:p>
+            <a:pPr algn="l">
+              <a:defRPr/>
+            </a:pPr>
+            <a:r>
+              <a:rPr lang="ru-RU" sz="2000" dirty="0"/>
+              <a:t>Обучающийся: Ольховский Я.А. 3 курс</a:t>
+            </a:r>
+            <a:endParaRPr lang="ru-RU" sz="2000" dirty="0">
+              <a:latin typeface="Times New Roman"/>
+              <a:cs typeface="Times New Roman"/>
+            </a:endParaRPr>
+          </a:p>
+          <a:p>
+            <a:pPr algn="l">
+              <a:defRPr/>
+            </a:pPr>
+            <a:endParaRPr lang="ru-RU" sz="2400" b="0" i="0" u="none" strike="noStrike" cap="none" spc="0" dirty="0">
+              <a:solidFill>
+                <a:schemeClr val="tx1"/>
+              </a:solidFill>
+              <a:latin typeface="Times New Roman"/>
+              <a:cs typeface="Times New Roman"/>
+            </a:endParaRPr>
+          </a:p>
+        </p:txBody>
+      </p:sp>
+      <p:sp>
+        <p:nvSpPr>
+          <p:cNvPr id="1088542254" name="Subtitle 2">
+            <a:extLst>
+              <a:ext uri="{FF2B5EF4-FFF2-40B4-BE49-F238E27FC236}">
+                <a16:creationId xmlns:a16="http://schemas.microsoft.com/office/drawing/2014/main" id="{E37F5723-5A52-58E4-B2E0-8A177DEAEEF7}"/>
+              </a:ext>
+            </a:extLst>
+          </p:cNvPr>
+          <p:cNvSpPr>
+            <a:spLocks noGrp="1"/>
+          </p:cNvSpPr>
+          <p:nvPr/>
+        </p:nvSpPr>
+        <p:spPr bwMode="auto">
+          <a:xfrm>
+            <a:off x="400050" y="294480"/>
+            <a:ext cx="11410949" cy="3134516"/>
+          </a:xfrm>
+        </p:spPr>
+        <p:txBody>
+          <a:bodyPr vertOverflow="overflow" horzOverflow="overflow" vert="horz" wrap="square" lIns="91440" tIns="45720" rIns="91440" bIns="45720" numCol="1" spcCol="0" rtlCol="0" fromWordArt="0" anchor="t" anchorCtr="0" forceAA="0" compatLnSpc="0">
+            <a:normAutofit fontScale="87500" lnSpcReduction="14000"/>
+          </a:bodyPr>
+          <a:lstStyle>
+            <a:lvl1pPr marL="0" indent="0" algn="ctr" defTabSz="914400" rtl="0">
+              <a:lnSpc>
+                <a:spcPct val="90000"/>
+              </a:lnSpc>
+              <a:spcBef>
+                <a:spcPts val="995"/>
+              </a:spcBef>
+              <a:buFont typeface="Arial"/>
+              <a:buNone/>
+              <a:defRPr sz="2400">
+                <a:solidFill>
+                  <a:schemeClr val="tx1"/>
+                </a:solidFill>
+                <a:latin typeface="+mn-lt"/>
+                <a:ea typeface="+mn-ea"/>
+                <a:cs typeface="+mn-cs"/>
+              </a:defRPr>
+            </a:lvl1pPr>
+            <a:lvl2pPr marL="457200" indent="0" algn="ctr" defTabSz="914400" rtl="0">
+              <a:lnSpc>
+                <a:spcPct val="90000"/>
+              </a:lnSpc>
+              <a:spcBef>
+                <a:spcPts val="495"/>
+              </a:spcBef>
+              <a:buFont typeface="Arial"/>
+              <a:buNone/>
+              <a:defRPr sz="2000">
+                <a:solidFill>
+                  <a:schemeClr val="tx1"/>
+                </a:solidFill>
+                <a:latin typeface="+mn-lt"/>
+                <a:ea typeface="+mn-ea"/>
+                <a:cs typeface="+mn-cs"/>
+              </a:defRPr>
+            </a:lvl2pPr>
+            <a:lvl3pPr marL="914400" indent="0" algn="ctr" defTabSz="914400" rtl="0">
+              <a:lnSpc>
+                <a:spcPct val="90000"/>
+              </a:lnSpc>
+              <a:spcBef>
+                <a:spcPts val="495"/>
+              </a:spcBef>
+              <a:buFont typeface="Arial"/>
+              <a:buNone/>
+              <a:defRPr sz="1800">
+                <a:solidFill>
+                  <a:schemeClr val="tx1"/>
+                </a:solidFill>
+                <a:latin typeface="+mn-lt"/>
+                <a:ea typeface="+mn-ea"/>
+                <a:cs typeface="+mn-cs"/>
+              </a:defRPr>
+            </a:lvl3pPr>
+            <a:lvl4pPr marL="1371600" indent="0" algn="ctr" defTabSz="914400" rtl="0">
+              <a:lnSpc>
+                <a:spcPct val="90000"/>
+              </a:lnSpc>
+              <a:spcBef>
+                <a:spcPts val="495"/>
+              </a:spcBef>
+              <a:buFont typeface="Arial"/>
+              <a:buNone/>
+              <a:defRPr sz="1600">
+                <a:solidFill>
+                  <a:schemeClr val="tx1"/>
+                </a:solidFill>
+                <a:latin typeface="+mn-lt"/>
+                <a:ea typeface="+mn-ea"/>
+                <a:cs typeface="+mn-cs"/>
+              </a:defRPr>
+            </a:lvl4pPr>
+            <a:lvl5pPr marL="1828800" indent="0" algn="ctr" defTabSz="914400" rtl="0">
+              <a:lnSpc>
+                <a:spcPct val="90000"/>
+              </a:lnSpc>
+              <a:spcBef>
+                <a:spcPts val="495"/>
+              </a:spcBef>
+              <a:buFont typeface="Arial"/>
+              <a:buNone/>
+              <a:defRPr sz="1600">
+                <a:solidFill>
+                  <a:schemeClr val="tx1"/>
+                </a:solidFill>
+                <a:latin typeface="+mn-lt"/>
+                <a:ea typeface="+mn-ea"/>
+                <a:cs typeface="+mn-cs"/>
+              </a:defRPr>
+            </a:lvl5pPr>
+            <a:lvl6pPr marL="2286000" indent="0" algn="ctr" defTabSz="914400" rtl="0">
+              <a:lnSpc>
+                <a:spcPct val="90000"/>
+              </a:lnSpc>
+              <a:spcBef>
+                <a:spcPts val="495"/>
+              </a:spcBef>
+              <a:buFont typeface="Arial"/>
+              <a:buNone/>
+              <a:defRPr sz="1600">
+                <a:solidFill>
+                  <a:schemeClr val="tx1"/>
+                </a:solidFill>
+                <a:latin typeface="+mn-lt"/>
+                <a:ea typeface="+mn-ea"/>
+                <a:cs typeface="+mn-cs"/>
+              </a:defRPr>
+            </a:lvl6pPr>
+            <a:lvl7pPr marL="2743200" indent="0" algn="ctr" defTabSz="914400" rtl="0">
+              <a:lnSpc>
+                <a:spcPct val="90000"/>
+              </a:lnSpc>
+              <a:spcBef>
+                <a:spcPts val="495"/>
+              </a:spcBef>
+              <a:buFont typeface="Arial"/>
+              <a:buNone/>
+              <a:defRPr sz="1600">
+                <a:solidFill>
+                  <a:schemeClr val="tx1"/>
+                </a:solidFill>
+                <a:latin typeface="+mn-lt"/>
+                <a:ea typeface="+mn-ea"/>
+                <a:cs typeface="+mn-cs"/>
+              </a:defRPr>
+            </a:lvl7pPr>
+            <a:lvl8pPr marL="3200400" indent="0" algn="ctr" defTabSz="914400" rtl="0">
+              <a:lnSpc>
+                <a:spcPct val="90000"/>
+              </a:lnSpc>
+              <a:spcBef>
+                <a:spcPts val="495"/>
+              </a:spcBef>
+              <a:buFont typeface="Arial"/>
+              <a:buNone/>
+              <a:defRPr sz="1600">
+                <a:solidFill>
+                  <a:schemeClr val="tx1"/>
+                </a:solidFill>
+                <a:latin typeface="+mn-lt"/>
+                <a:ea typeface="+mn-ea"/>
+                <a:cs typeface="+mn-cs"/>
+              </a:defRPr>
+            </a:lvl8pPr>
+            <a:lvl9pPr marL="3657600" indent="0" algn="ctr" defTabSz="914400" rtl="0">
+              <a:lnSpc>
+                <a:spcPct val="90000"/>
+              </a:lnSpc>
+              <a:spcBef>
+                <a:spcPts val="495"/>
+              </a:spcBef>
+              <a:buFont typeface="Arial"/>
+              <a:buNone/>
+              <a:defRPr sz="1600">
+                <a:solidFill>
+                  <a:schemeClr val="tx1"/>
+                </a:solidFill>
+                <a:latin typeface="+mn-lt"/>
+                <a:ea typeface="+mn-ea"/>
+                <a:cs typeface="+mn-cs"/>
+              </a:defRPr>
+            </a:lvl9pPr>
+          </a:lstStyle>
+          <a:p>
+            <a:pPr>
+              <a:defRPr/>
+            </a:pPr>
+            <a:r>
+              <a:rPr sz="2400" b="0" i="0" u="none" dirty="0">
+                <a:solidFill>
+                  <a:srgbClr val="000000"/>
+                </a:solidFill>
+                <a:latin typeface="Times New Roman"/>
+                <a:ea typeface="Times New Roman"/>
+                <a:cs typeface="Times New Roman"/>
+              </a:rPr>
+              <a:t>МИНОБРНАУКИ РОССИИ </a:t>
+            </a:r>
+          </a:p>
+          <a:p>
+            <a:pPr>
+              <a:defRPr/>
+            </a:pPr>
+            <a:r>
+              <a:rPr sz="2400" b="0" i="0" u="none" dirty="0">
+                <a:solidFill>
+                  <a:srgbClr val="000000"/>
+                </a:solidFill>
+                <a:latin typeface="Times New Roman"/>
+                <a:ea typeface="Times New Roman"/>
+                <a:cs typeface="Times New Roman"/>
+              </a:rPr>
+              <a:t>ФЕДЕРАЛЬНОЕ ГОСУДАРСТВЕННОЕ БЮДЖЕТНОЕ ОБРАЗОВАТЕЛЬНОЕ </a:t>
+            </a:r>
+          </a:p>
+          <a:p>
+            <a:pPr>
+              <a:defRPr/>
+            </a:pPr>
+            <a:r>
+              <a:rPr sz="2400" b="0" i="0" u="none" dirty="0">
+                <a:solidFill>
+                  <a:srgbClr val="000000"/>
+                </a:solidFill>
+                <a:latin typeface="Times New Roman"/>
+                <a:ea typeface="Times New Roman"/>
+                <a:cs typeface="Times New Roman"/>
+              </a:rPr>
+              <a:t>УЧРЕЖДЕНИЕ ВЫСШЕГО ОБРАЗОВАНИЯ </a:t>
+            </a:r>
+          </a:p>
+          <a:p>
+            <a:pPr>
+              <a:defRPr/>
+            </a:pPr>
+            <a:r>
+              <a:rPr sz="2400" b="0" i="0" u="none" dirty="0">
+                <a:solidFill>
+                  <a:srgbClr val="000000"/>
+                </a:solidFill>
+                <a:latin typeface="Times New Roman"/>
+                <a:ea typeface="Times New Roman"/>
+                <a:cs typeface="Times New Roman"/>
+              </a:rPr>
+              <a:t>«ВОРОНЕЖСКИЙ ГОСУДАРСТВЕННЫЙ УНИВЕРСИТЕТ» </a:t>
+            </a:r>
+          </a:p>
+          <a:p>
+            <a:pPr>
+              <a:defRPr/>
+            </a:pPr>
+            <a:r>
+              <a:rPr sz="2400" b="0" i="0" u="none" dirty="0">
+                <a:solidFill>
+                  <a:srgbClr val="000000"/>
+                </a:solidFill>
+                <a:latin typeface="Times New Roman"/>
+                <a:ea typeface="Times New Roman"/>
+                <a:cs typeface="Times New Roman"/>
+              </a:rPr>
+              <a:t>(ФГБОУ ВО «ВГУ»)</a:t>
+            </a:r>
+            <a:endParaRPr sz="3600" dirty="0"/>
+          </a:p>
+          <a:p>
+            <a:pPr>
+              <a:defRPr/>
+            </a:pPr>
+            <a:endParaRPr sz="3600" dirty="0"/>
+          </a:p>
+          <a:p>
+            <a:pPr>
+              <a:defRPr/>
+            </a:pPr>
+            <a:r>
+              <a:rPr sz="2400" b="0" i="0" u="none" dirty="0" err="1">
+                <a:solidFill>
+                  <a:srgbClr val="000000"/>
+                </a:solidFill>
+                <a:latin typeface="Times New Roman"/>
+                <a:ea typeface="Times New Roman"/>
+                <a:cs typeface="Times New Roman"/>
+              </a:rPr>
+              <a:t>Факультет</a:t>
+            </a:r>
+            <a:r>
+              <a:rPr sz="2400" b="0" i="0" u="none" dirty="0">
+                <a:solidFill>
+                  <a:srgbClr val="000000"/>
+                </a:solidFill>
+                <a:latin typeface="Times New Roman"/>
+                <a:ea typeface="Times New Roman"/>
+                <a:cs typeface="Times New Roman"/>
+              </a:rPr>
+              <a:t> </a:t>
+            </a:r>
+            <a:r>
+              <a:rPr sz="2400" b="0" i="0" u="none" dirty="0" err="1">
+                <a:solidFill>
+                  <a:srgbClr val="000000"/>
+                </a:solidFill>
+                <a:latin typeface="Times New Roman"/>
+                <a:ea typeface="Times New Roman"/>
+                <a:cs typeface="Times New Roman"/>
+              </a:rPr>
+              <a:t>компьютерных</a:t>
+            </a:r>
+            <a:r>
+              <a:rPr sz="2400" b="0" i="0" u="none" dirty="0">
+                <a:solidFill>
+                  <a:srgbClr val="000000"/>
+                </a:solidFill>
+                <a:latin typeface="Times New Roman"/>
+                <a:ea typeface="Times New Roman"/>
+                <a:cs typeface="Times New Roman"/>
+              </a:rPr>
+              <a:t> </a:t>
+            </a:r>
+            <a:r>
+              <a:rPr sz="2400" b="0" i="0" u="none" dirty="0" err="1">
+                <a:solidFill>
+                  <a:srgbClr val="000000"/>
+                </a:solidFill>
+                <a:latin typeface="Times New Roman"/>
+                <a:ea typeface="Times New Roman"/>
+                <a:cs typeface="Times New Roman"/>
+              </a:rPr>
+              <a:t>наук</a:t>
+            </a:r>
+            <a:r>
+              <a:rPr sz="2400" b="0" i="0" u="none" dirty="0">
+                <a:solidFill>
+                  <a:srgbClr val="000000"/>
+                </a:solidFill>
+                <a:latin typeface="Times New Roman"/>
+                <a:ea typeface="Times New Roman"/>
+                <a:cs typeface="Times New Roman"/>
+              </a:rPr>
+              <a:t> </a:t>
+            </a:r>
+          </a:p>
+          <a:p>
+            <a:pPr>
+              <a:defRPr/>
+            </a:pPr>
+            <a:r>
+              <a:rPr sz="2400" b="0" i="0" u="none" dirty="0" err="1">
+                <a:solidFill>
+                  <a:srgbClr val="000000"/>
+                </a:solidFill>
+                <a:latin typeface="Times New Roman"/>
+                <a:ea typeface="Times New Roman"/>
+                <a:cs typeface="Times New Roman"/>
+              </a:rPr>
+              <a:t>Кафедра</a:t>
+            </a:r>
+            <a:r>
+              <a:rPr sz="2400" b="0" i="0" u="none" dirty="0">
+                <a:solidFill>
+                  <a:srgbClr val="000000"/>
+                </a:solidFill>
+                <a:latin typeface="Times New Roman"/>
+                <a:ea typeface="Times New Roman"/>
+                <a:cs typeface="Times New Roman"/>
+              </a:rPr>
+              <a:t> </a:t>
+            </a:r>
+            <a:r>
+              <a:rPr sz="2400" b="0" i="0" u="none" dirty="0" err="1">
+                <a:solidFill>
+                  <a:srgbClr val="000000"/>
+                </a:solidFill>
+                <a:latin typeface="Times New Roman"/>
+                <a:ea typeface="Times New Roman"/>
+                <a:cs typeface="Times New Roman"/>
+              </a:rPr>
+              <a:t>программирования</a:t>
+            </a:r>
+            <a:r>
+              <a:rPr sz="2400" b="0" i="0" u="none" dirty="0">
+                <a:solidFill>
+                  <a:srgbClr val="000000"/>
+                </a:solidFill>
+                <a:latin typeface="Times New Roman"/>
+                <a:ea typeface="Times New Roman"/>
+                <a:cs typeface="Times New Roman"/>
+              </a:rPr>
+              <a:t> и </a:t>
+            </a:r>
+            <a:r>
+              <a:rPr sz="2400" b="0" i="0" u="none" dirty="0" err="1">
+                <a:solidFill>
+                  <a:srgbClr val="000000"/>
+                </a:solidFill>
+                <a:latin typeface="Times New Roman"/>
+                <a:ea typeface="Times New Roman"/>
+                <a:cs typeface="Times New Roman"/>
+              </a:rPr>
+              <a:t>информационных</a:t>
+            </a:r>
+            <a:r>
+              <a:rPr sz="2400" b="0" i="0" u="none" dirty="0">
+                <a:solidFill>
+                  <a:srgbClr val="000000"/>
+                </a:solidFill>
+                <a:latin typeface="Times New Roman"/>
+                <a:ea typeface="Times New Roman"/>
+                <a:cs typeface="Times New Roman"/>
+              </a:rPr>
+              <a:t> </a:t>
+            </a:r>
+            <a:r>
+              <a:rPr sz="2400" b="0" i="0" u="none" dirty="0" err="1">
+                <a:solidFill>
+                  <a:srgbClr val="000000"/>
+                </a:solidFill>
+                <a:latin typeface="Times New Roman"/>
+                <a:ea typeface="Times New Roman"/>
+                <a:cs typeface="Times New Roman"/>
+              </a:rPr>
+              <a:t>технологий</a:t>
+            </a:r>
+            <a:endParaRPr sz="2400" dirty="0"/>
+          </a:p>
+        </p:txBody>
+      </p:sp>
+    </p:spTree>
+    <p:extLst>
+      <p:ext uri="{BB962C8B-B14F-4D97-AF65-F5344CB8AC3E}">
+        <p14:creationId xmlns:p14="http://schemas.microsoft.com/office/powerpoint/2010/main" val="1744232955"/>
+      </p:ext>
+    </p:extLst>
+  </p:cSld>
+  <p:clrMapOvr>
+    <a:masterClrMapping/>
+  </p:clrMapOvr>
+  <p:transition/>
 </p:sld>
 </file>
 
@@ -6806,7 +7412,7 @@
             </a:endParaRPr>
           </a:p>
           <a:p>
-            <a:pPr>
+            <a:pPr algn="just">
               <a:defRPr/>
             </a:pPr>
             <a:r>
@@ -6819,7 +7425,7 @@
             </a:r>
           </a:p>
           <a:p>
-            <a:pPr>
+            <a:pPr algn="just">
               <a:defRPr/>
             </a:pPr>
             <a:r>
@@ -6832,7 +7438,7 @@
             </a:r>
           </a:p>
           <a:p>
-            <a:pPr>
+            <a:pPr algn="just">
               <a:defRPr/>
             </a:pPr>
             <a:r>
@@ -6845,7 +7451,7 @@
             </a:r>
           </a:p>
           <a:p>
-            <a:pPr marL="0" indent="0">
+            <a:pPr marL="0" indent="0" algn="just">
               <a:buNone/>
               <a:defRPr/>
             </a:pPr>
@@ -6859,7 +7465,7 @@
             </a:endParaRPr>
           </a:p>
           <a:p>
-            <a:pPr marL="0" indent="0">
+            <a:pPr marL="0" indent="0" algn="just">
               <a:buNone/>
               <a:defRPr/>
             </a:pPr>
@@ -6883,7 +7489,7 @@
             </a:endParaRPr>
           </a:p>
           <a:p>
-            <a:pPr>
+            <a:pPr algn="just">
               <a:defRPr/>
             </a:pPr>
             <a:r>
@@ -6896,7 +7502,7 @@
             </a:r>
           </a:p>
           <a:p>
-            <a:pPr>
+            <a:pPr algn="just">
               <a:defRPr/>
             </a:pPr>
             <a:r>
@@ -7034,7 +7640,7 @@
           <a:bodyPr/>
           <a:lstStyle/>
           <a:p>
-            <a:pPr marL="0" indent="0">
+            <a:pPr marL="0" indent="0" algn="just">
               <a:buNone/>
               <a:defRPr/>
             </a:pPr>
@@ -7138,7 +7744,7 @@
               <a:defRPr/>
             </a:pPr>
             <a:r>
-              <a:rPr lang="ru-RU" sz="4400" b="0" i="0" u="none" strike="noStrike" cap="none" spc="0">
+              <a:rPr lang="ru-RU" sz="4400" b="0" i="0" u="none" strike="noStrike" cap="none" spc="0" dirty="0">
                 <a:solidFill>
                   <a:schemeClr val="tx1"/>
                 </a:solidFill>
@@ -7148,7 +7754,7 @@
               </a:rPr>
               <a:t>Постановка задачи</a:t>
             </a:r>
-            <a:endParaRPr/>
+            <a:endParaRPr dirty="0"/>
           </a:p>
         </p:txBody>
       </p:sp>
@@ -7174,7 +7780,7 @@
           </a:bodyPr>
           <a:lstStyle/>
           <a:p>
-            <a:pPr>
+            <a:pPr algn="just">
               <a:buFont typeface="Arial" panose="020B0604020202020204" pitchFamily="34" charset="0"/>
               <a:buChar char="•"/>
               <a:defRPr/>
@@ -7185,7 +7791,7 @@
             </a:r>
           </a:p>
           <a:p>
-            <a:pPr>
+            <a:pPr algn="just">
               <a:buFont typeface="Arial" panose="020B0604020202020204" pitchFamily="34" charset="0"/>
               <a:buChar char="•"/>
               <a:defRPr/>
@@ -7196,7 +7802,7 @@
             </a:r>
           </a:p>
           <a:p>
-            <a:pPr>
+            <a:pPr algn="just">
               <a:buFont typeface="Arial" panose="020B0604020202020204" pitchFamily="34" charset="0"/>
               <a:buChar char="•"/>
               <a:defRPr/>
@@ -7207,7 +7813,7 @@
             </a:r>
           </a:p>
           <a:p>
-            <a:pPr>
+            <a:pPr algn="just">
               <a:buFont typeface="Arial" panose="020B0604020202020204" pitchFamily="34" charset="0"/>
               <a:buChar char="•"/>
               <a:defRPr/>
@@ -7603,7 +8209,13 @@
   <p:cSld>
     <p:spTree>
       <p:nvGrpSpPr>
-        <p:cNvPr id="1" name=""/>
+        <p:cNvPr id="1" name="">
+          <a:extLst>
+            <a:ext uri="{FF2B5EF4-FFF2-40B4-BE49-F238E27FC236}">
+              <a16:creationId xmlns:a16="http://schemas.microsoft.com/office/drawing/2014/main" id="{C68C50B7-3445-47C4-024F-871E01BDED59}"/>
+            </a:ext>
+          </a:extLst>
+        </p:cNvPr>
         <p:cNvGrpSpPr/>
         <p:nvPr/>
       </p:nvGrpSpPr>
@@ -7617,10 +8229,42 @@
       </p:grpSpPr>
       <p:sp>
         <p:nvSpPr>
+          <p:cNvPr id="1966118867" name="Заголовок 1">
+            <a:extLst>
+              <a:ext uri="{FF2B5EF4-FFF2-40B4-BE49-F238E27FC236}">
+                <a16:creationId xmlns:a16="http://schemas.microsoft.com/office/drawing/2014/main" id="{FB0DD5B9-968B-57E9-DA62-05C8DF118397}"/>
+              </a:ext>
+            </a:extLst>
+          </p:cNvPr>
+          <p:cNvSpPr>
+            <a:spLocks noGrp="1"/>
+          </p:cNvSpPr>
+          <p:nvPr>
+            <p:ph type="title"/>
+          </p:nvPr>
+        </p:nvSpPr>
+        <p:spPr bwMode="auto"/>
+        <p:txBody>
+          <a:bodyPr/>
+          <a:lstStyle/>
+          <a:p>
+            <a:pPr>
+              <a:defRPr/>
+            </a:pPr>
+            <a:r>
+              <a:rPr lang="ru-RU" dirty="0"/>
+              <a:t>База данных</a:t>
+            </a:r>
+            <a:endParaRPr dirty="0"/>
+          </a:p>
+        </p:txBody>
+      </p:sp>
+      <p:sp>
+        <p:nvSpPr>
           <p:cNvPr id="2" name="Номер слайда 1">
             <a:extLst>
               <a:ext uri="{FF2B5EF4-FFF2-40B4-BE49-F238E27FC236}">
-                <a16:creationId xmlns:a16="http://schemas.microsoft.com/office/drawing/2014/main" id="{1B748C69-25D2-43D7-7ACC-7F2246DB6E69}"/>
+                <a16:creationId xmlns:a16="http://schemas.microsoft.com/office/drawing/2014/main" id="{E2E3194D-C948-BE93-2B80-58E0015FA792}"/>
               </a:ext>
             </a:extLst>
           </p:cNvPr>
@@ -7649,10 +8293,10 @@
       </p:sp>
       <p:pic>
         <p:nvPicPr>
-          <p:cNvPr id="4" name="Рисунок 3">
+          <p:cNvPr id="5" name="Рисунок 4">
             <a:extLst>
               <a:ext uri="{FF2B5EF4-FFF2-40B4-BE49-F238E27FC236}">
-                <a16:creationId xmlns:a16="http://schemas.microsoft.com/office/drawing/2014/main" id="{9E8BB969-3B0A-9D66-CCA8-12567DA34E14}"/>
+                <a16:creationId xmlns:a16="http://schemas.microsoft.com/office/drawing/2014/main" id="{91EB2DEC-ADA8-6C53-F323-9E0327648A51}"/>
               </a:ext>
             </a:extLst>
           </p:cNvPr>
@@ -7675,66 +8319,25 @@
         </p:blipFill>
         <p:spPr>
           <a:xfrm>
-            <a:off x="2686345" y="365125"/>
-            <a:ext cx="8591550" cy="6467475"/>
+            <a:off x="1354085" y="1390306"/>
+            <a:ext cx="8930557" cy="5331169"/>
           </a:xfrm>
           <a:prstGeom prst="rect">
             <a:avLst/>
           </a:prstGeom>
         </p:spPr>
       </p:pic>
-      <p:sp>
-        <p:nvSpPr>
-          <p:cNvPr id="424718340" name="Заголовок 1"/>
-          <p:cNvSpPr>
-            <a:spLocks noGrp="1"/>
-          </p:cNvSpPr>
-          <p:nvPr>
-            <p:ph type="title"/>
-          </p:nvPr>
-        </p:nvSpPr>
-        <p:spPr bwMode="auto">
-          <a:xfrm>
-            <a:off x="914105" y="91747"/>
-            <a:ext cx="4223209" cy="1077177"/>
-          </a:xfrm>
-        </p:spPr>
-        <p:txBody>
-          <a:bodyPr/>
-          <a:lstStyle/>
-          <a:p>
-            <a:pPr>
-              <a:defRPr/>
-            </a:pPr>
-            <a:r>
-              <a:rPr dirty="0" err="1"/>
-              <a:t>База</a:t>
-            </a:r>
-            <a:r>
-              <a:rPr dirty="0"/>
-              <a:t> </a:t>
-            </a:r>
-            <a:r>
-              <a:rPr dirty="0" err="1"/>
-              <a:t>данных</a:t>
-            </a:r>
-            <a:endParaRPr dirty="0"/>
-          </a:p>
-        </p:txBody>
-      </p:sp>
     </p:spTree>
+    <p:extLst>
+      <p:ext uri="{BB962C8B-B14F-4D97-AF65-F5344CB8AC3E}">
+        <p14:creationId xmlns:p14="http://schemas.microsoft.com/office/powerpoint/2010/main" val="123749947"/>
+      </p:ext>
+    </p:extLst>
   </p:cSld>
   <p:clrMapOvr>
     <a:masterClrMapping/>
   </p:clrMapOvr>
-  <mc:AlternateContent xmlns:mc="http://schemas.openxmlformats.org/markup-compatibility/2006" xmlns:p159="http://schemas.microsoft.com/office/powerpoint/2015/09/main">
-    <mc:Choice Requires="p159">
-      <p:transition/>
-    </mc:Choice>
-    <mc:Fallback xmlns:w="http://schemas.openxmlformats.org/wordprocessingml/2006/main" xmlns:m="http://schemas.openxmlformats.org/officeDocument/2006/math" xmlns="">
-      <p:transition advClick="1"/>
-    </mc:Fallback>
-  </mc:AlternateContent>
+  <p:transition/>
 </p:sld>
 </file>
 
@@ -7743,7 +8346,13 @@
   <p:cSld>
     <p:spTree>
       <p:nvGrpSpPr>
-        <p:cNvPr id="1" name=""/>
+        <p:cNvPr id="1" name="">
+          <a:extLst>
+            <a:ext uri="{FF2B5EF4-FFF2-40B4-BE49-F238E27FC236}">
+              <a16:creationId xmlns:a16="http://schemas.microsoft.com/office/drawing/2014/main" id="{A57AF2E5-DE00-2217-CA1E-79DA48B2EB88}"/>
+            </a:ext>
+          </a:extLst>
+        </p:cNvPr>
         <p:cNvGrpSpPr/>
         <p:nvPr/>
       </p:nvGrpSpPr>
@@ -7757,10 +8366,42 @@
       </p:grpSpPr>
       <p:sp>
         <p:nvSpPr>
+          <p:cNvPr id="1966118867" name="Заголовок 1">
+            <a:extLst>
+              <a:ext uri="{FF2B5EF4-FFF2-40B4-BE49-F238E27FC236}">
+                <a16:creationId xmlns:a16="http://schemas.microsoft.com/office/drawing/2014/main" id="{03A77447-9D72-59DF-A89E-086756A8011C}"/>
+              </a:ext>
+            </a:extLst>
+          </p:cNvPr>
+          <p:cNvSpPr>
+            <a:spLocks noGrp="1"/>
+          </p:cNvSpPr>
+          <p:nvPr>
+            <p:ph type="title"/>
+          </p:nvPr>
+        </p:nvSpPr>
+        <p:spPr bwMode="auto"/>
+        <p:txBody>
+          <a:bodyPr/>
+          <a:lstStyle/>
+          <a:p>
+            <a:pPr>
+              <a:defRPr/>
+            </a:pPr>
+            <a:r>
+              <a:rPr lang="ru-RU" dirty="0"/>
+              <a:t>База данных</a:t>
+            </a:r>
+            <a:endParaRPr dirty="0"/>
+          </a:p>
+        </p:txBody>
+      </p:sp>
+      <p:sp>
+        <p:nvSpPr>
           <p:cNvPr id="2" name="Номер слайда 1">
             <a:extLst>
               <a:ext uri="{FF2B5EF4-FFF2-40B4-BE49-F238E27FC236}">
-                <a16:creationId xmlns:a16="http://schemas.microsoft.com/office/drawing/2014/main" id="{F3B98E7B-688A-A9FE-E94C-DA74DD5D0A99}"/>
+                <a16:creationId xmlns:a16="http://schemas.microsoft.com/office/drawing/2014/main" id="{F52AF1FF-72B2-4104-533F-EB3955AABB04}"/>
               </a:ext>
             </a:extLst>
           </p:cNvPr>
@@ -7789,10 +8430,10 @@
       </p:sp>
       <p:pic>
         <p:nvPicPr>
-          <p:cNvPr id="4" name="Рисунок 3">
+          <p:cNvPr id="6" name="Рисунок 5">
             <a:extLst>
               <a:ext uri="{FF2B5EF4-FFF2-40B4-BE49-F238E27FC236}">
-                <a16:creationId xmlns:a16="http://schemas.microsoft.com/office/drawing/2014/main" id="{A54CD869-CA7A-83EE-8972-A706C3DD3E1A}"/>
+                <a16:creationId xmlns:a16="http://schemas.microsoft.com/office/drawing/2014/main" id="{B89C1BD6-A331-EFCB-1E90-61B26AAEFE3B}"/>
               </a:ext>
             </a:extLst>
           </p:cNvPr>
@@ -7809,72 +8450,31 @@
               </a:ext>
             </a:extLst>
           </a:blip>
-          <a:srcRect t="3761"/>
           <a:stretch>
             <a:fillRect/>
           </a:stretch>
         </p:blipFill>
         <p:spPr>
           <a:xfrm>
-            <a:off x="5987830" y="0"/>
-            <a:ext cx="5924269" cy="6634277"/>
+            <a:off x="2213090" y="1765701"/>
+            <a:ext cx="7336263" cy="3835226"/>
           </a:xfrm>
           <a:prstGeom prst="rect">
             <a:avLst/>
           </a:prstGeom>
         </p:spPr>
       </p:pic>
-      <p:sp>
-        <p:nvSpPr>
-          <p:cNvPr id="1018604747" name="Заголовок 1"/>
-          <p:cNvSpPr>
-            <a:spLocks noGrp="1"/>
-          </p:cNvSpPr>
-          <p:nvPr>
-            <p:ph type="title"/>
-          </p:nvPr>
-        </p:nvSpPr>
-        <p:spPr bwMode="auto">
-          <a:xfrm>
-            <a:off x="838200" y="713917"/>
-            <a:ext cx="10515600" cy="1325563"/>
-          </a:xfrm>
-        </p:spPr>
-        <p:txBody>
-          <a:bodyPr/>
-          <a:lstStyle/>
-          <a:p>
-            <a:pPr>
-              <a:defRPr/>
-            </a:pPr>
-            <a:r>
-              <a:rPr lang="ru-RU" dirty="0"/>
-              <a:t>Диаграмма</a:t>
-            </a:r>
-            <a:br>
-              <a:rPr lang="ru-RU" dirty="0"/>
-            </a:br>
-            <a:r>
-              <a:rPr lang="ru-RU" dirty="0"/>
-              <a:t>прецедентов</a:t>
-            </a:r>
-            <a:endParaRPr dirty="0"/>
-          </a:p>
-        </p:txBody>
-      </p:sp>
     </p:spTree>
+    <p:extLst>
+      <p:ext uri="{BB962C8B-B14F-4D97-AF65-F5344CB8AC3E}">
+        <p14:creationId xmlns:p14="http://schemas.microsoft.com/office/powerpoint/2010/main" val="2831090226"/>
+      </p:ext>
+    </p:extLst>
   </p:cSld>
   <p:clrMapOvr>
     <a:masterClrMapping/>
   </p:clrMapOvr>
-  <mc:AlternateContent xmlns:mc="http://schemas.openxmlformats.org/markup-compatibility/2006" xmlns:p159="http://schemas.microsoft.com/office/powerpoint/2015/09/main">
-    <mc:Choice Requires="p159">
-      <p:transition/>
-    </mc:Choice>
-    <mc:Fallback xmlns:w="http://schemas.openxmlformats.org/wordprocessingml/2006/main" xmlns:m="http://schemas.openxmlformats.org/officeDocument/2006/math" xmlns="">
-      <p:transition advClick="1"/>
-    </mc:Fallback>
-  </mc:AlternateContent>
+  <p:transition/>
 </p:sld>
 </file>
 
@@ -7883,7 +8483,13 @@
   <p:cSld>
     <p:spTree>
       <p:nvGrpSpPr>
-        <p:cNvPr id="1" name=""/>
+        <p:cNvPr id="1" name="">
+          <a:extLst>
+            <a:ext uri="{FF2B5EF4-FFF2-40B4-BE49-F238E27FC236}">
+              <a16:creationId xmlns:a16="http://schemas.microsoft.com/office/drawing/2014/main" id="{40A05398-CD3B-E6AE-21EF-9E0A69306AAF}"/>
+            </a:ext>
+          </a:extLst>
+        </p:cNvPr>
         <p:cNvGrpSpPr/>
         <p:nvPr/>
       </p:nvGrpSpPr>
@@ -7897,7 +8503,13 @@
       </p:grpSpPr>
       <p:sp>
         <p:nvSpPr>
-          <p:cNvPr id="210375120" name="Заголовок 1"/>
+          <p:cNvPr id="1966118867" name="Заголовок 1">
+            <a:extLst>
+              <a:ext uri="{FF2B5EF4-FFF2-40B4-BE49-F238E27FC236}">
+                <a16:creationId xmlns:a16="http://schemas.microsoft.com/office/drawing/2014/main" id="{9A18290D-D7E6-907C-01A3-0C25135E9D4C}"/>
+              </a:ext>
+            </a:extLst>
+          </p:cNvPr>
           <p:cNvSpPr>
             <a:spLocks noGrp="1"/>
           </p:cNvSpPr>
@@ -7914,218 +8526,18 @@
               <a:defRPr/>
             </a:pPr>
             <a:r>
-              <a:rPr dirty="0" err="1"/>
-              <a:t>Реализация</a:t>
-            </a:r>
-            <a:r>
-              <a:rPr dirty="0"/>
+              <a:rPr lang="ru-RU" dirty="0"/>
+              <a:t>Диаграмма</a:t>
+            </a:r>
+            <a:r>
+              <a:rPr lang="en-US" dirty="0"/>
               <a:t> </a:t>
             </a:r>
             <a:r>
-              <a:rPr dirty="0" err="1"/>
-              <a:t>интерфейса</a:t>
+              <a:rPr lang="ru-RU" dirty="0"/>
+              <a:t>прецедентов</a:t>
             </a:r>
             <a:endParaRPr dirty="0"/>
-          </a:p>
-        </p:txBody>
-      </p:sp>
-      <p:sp>
-        <p:nvSpPr>
-          <p:cNvPr id="1280640338" name="Объект 6"/>
-          <p:cNvSpPr>
-            <a:spLocks noGrp="1"/>
-          </p:cNvSpPr>
-          <p:nvPr/>
-        </p:nvSpPr>
-        <p:spPr bwMode="auto">
-          <a:xfrm>
-            <a:off x="411909" y="1990869"/>
-            <a:ext cx="1943099" cy="761999"/>
-          </a:xfrm>
-        </p:spPr>
-        <p:txBody>
-          <a:bodyPr vertOverflow="overflow" horzOverflow="overflow" vert="horz" wrap="square" lIns="91440" tIns="45720" rIns="91440" bIns="45720" numCol="1" spcCol="0" rtlCol="0" fromWordArt="0" anchor="t" anchorCtr="0" forceAA="0" compatLnSpc="0">
-            <a:normAutofit fontScale="97500" lnSpcReduction="12000"/>
-          </a:bodyPr>
-          <a:lstStyle>
-            <a:lvl1pPr marL="228600" indent="-228600" algn="l" defTabSz="914400" rtl="0">
-              <a:lnSpc>
-                <a:spcPct val="90000"/>
-              </a:lnSpc>
-              <a:spcBef>
-                <a:spcPts val="997"/>
-              </a:spcBef>
-              <a:buFont typeface="Arial"/>
-              <a:buChar char="•"/>
-              <a:defRPr sz="2800">
-                <a:solidFill>
-                  <a:schemeClr val="tx1"/>
-                </a:solidFill>
-                <a:latin typeface="+mn-lt"/>
-                <a:ea typeface="+mn-ea"/>
-                <a:cs typeface="+mn-cs"/>
-              </a:defRPr>
-            </a:lvl1pPr>
-            <a:lvl2pPr marL="685800" indent="-228600" algn="l" defTabSz="914400" rtl="0">
-              <a:lnSpc>
-                <a:spcPct val="90000"/>
-              </a:lnSpc>
-              <a:spcBef>
-                <a:spcPts val="497"/>
-              </a:spcBef>
-              <a:buFont typeface="Arial"/>
-              <a:buChar char="•"/>
-              <a:defRPr sz="2400">
-                <a:solidFill>
-                  <a:schemeClr val="tx1"/>
-                </a:solidFill>
-                <a:latin typeface="+mn-lt"/>
-                <a:ea typeface="+mn-ea"/>
-                <a:cs typeface="+mn-cs"/>
-              </a:defRPr>
-            </a:lvl2pPr>
-            <a:lvl3pPr marL="1143000" indent="-228600" algn="l" defTabSz="914400" rtl="0">
-              <a:lnSpc>
-                <a:spcPct val="90000"/>
-              </a:lnSpc>
-              <a:spcBef>
-                <a:spcPts val="497"/>
-              </a:spcBef>
-              <a:buFont typeface="Arial"/>
-              <a:buChar char="•"/>
-              <a:defRPr sz="2000">
-                <a:solidFill>
-                  <a:schemeClr val="tx1"/>
-                </a:solidFill>
-                <a:latin typeface="+mn-lt"/>
-                <a:ea typeface="+mn-ea"/>
-                <a:cs typeface="+mn-cs"/>
-              </a:defRPr>
-            </a:lvl3pPr>
-            <a:lvl4pPr marL="1600200" indent="-228600" algn="l" defTabSz="914400" rtl="0">
-              <a:lnSpc>
-                <a:spcPct val="90000"/>
-              </a:lnSpc>
-              <a:spcBef>
-                <a:spcPts val="497"/>
-              </a:spcBef>
-              <a:buFont typeface="Arial"/>
-              <a:buChar char="•"/>
-              <a:defRPr sz="1800">
-                <a:solidFill>
-                  <a:schemeClr val="tx1"/>
-                </a:solidFill>
-                <a:latin typeface="+mn-lt"/>
-                <a:ea typeface="+mn-ea"/>
-                <a:cs typeface="+mn-cs"/>
-              </a:defRPr>
-            </a:lvl4pPr>
-            <a:lvl5pPr marL="2057400" indent="-228600" algn="l" defTabSz="914400" rtl="0">
-              <a:lnSpc>
-                <a:spcPct val="90000"/>
-              </a:lnSpc>
-              <a:spcBef>
-                <a:spcPts val="497"/>
-              </a:spcBef>
-              <a:buFont typeface="Arial"/>
-              <a:buChar char="•"/>
-              <a:defRPr sz="1800">
-                <a:solidFill>
-                  <a:schemeClr val="tx1"/>
-                </a:solidFill>
-                <a:latin typeface="+mn-lt"/>
-                <a:ea typeface="+mn-ea"/>
-                <a:cs typeface="+mn-cs"/>
-              </a:defRPr>
-            </a:lvl5pPr>
-            <a:lvl6pPr marL="2514597" indent="-228600" algn="l" defTabSz="914400" rtl="0">
-              <a:lnSpc>
-                <a:spcPct val="90000"/>
-              </a:lnSpc>
-              <a:spcBef>
-                <a:spcPts val="497"/>
-              </a:spcBef>
-              <a:buFont typeface="Arial"/>
-              <a:buChar char="•"/>
-              <a:defRPr sz="1800">
-                <a:solidFill>
-                  <a:schemeClr val="tx1"/>
-                </a:solidFill>
-                <a:latin typeface="+mn-lt"/>
-                <a:ea typeface="+mn-ea"/>
-                <a:cs typeface="+mn-cs"/>
-              </a:defRPr>
-            </a:lvl6pPr>
-            <a:lvl7pPr marL="2971800" indent="-228600" algn="l" defTabSz="914400" rtl="0">
-              <a:lnSpc>
-                <a:spcPct val="90000"/>
-              </a:lnSpc>
-              <a:spcBef>
-                <a:spcPts val="497"/>
-              </a:spcBef>
-              <a:buFont typeface="Arial"/>
-              <a:buChar char="•"/>
-              <a:defRPr sz="1800">
-                <a:solidFill>
-                  <a:schemeClr val="tx1"/>
-                </a:solidFill>
-                <a:latin typeface="+mn-lt"/>
-                <a:ea typeface="+mn-ea"/>
-                <a:cs typeface="+mn-cs"/>
-              </a:defRPr>
-            </a:lvl7pPr>
-            <a:lvl8pPr marL="3429000" indent="-228600" algn="l" defTabSz="914400" rtl="0">
-              <a:lnSpc>
-                <a:spcPct val="90000"/>
-              </a:lnSpc>
-              <a:spcBef>
-                <a:spcPts val="497"/>
-              </a:spcBef>
-              <a:buFont typeface="Arial"/>
-              <a:buChar char="•"/>
-              <a:defRPr sz="1800">
-                <a:solidFill>
-                  <a:schemeClr val="tx1"/>
-                </a:solidFill>
-                <a:latin typeface="+mn-lt"/>
-                <a:ea typeface="+mn-ea"/>
-                <a:cs typeface="+mn-cs"/>
-              </a:defRPr>
-            </a:lvl8pPr>
-            <a:lvl9pPr marL="3886200" indent="-228600" algn="l" defTabSz="914400" rtl="0">
-              <a:lnSpc>
-                <a:spcPct val="90000"/>
-              </a:lnSpc>
-              <a:spcBef>
-                <a:spcPts val="497"/>
-              </a:spcBef>
-              <a:buFont typeface="Arial"/>
-              <a:buChar char="•"/>
-              <a:defRPr sz="1800">
-                <a:solidFill>
-                  <a:schemeClr val="tx1"/>
-                </a:solidFill>
-                <a:latin typeface="+mn-lt"/>
-                <a:ea typeface="+mn-ea"/>
-                <a:cs typeface="+mn-cs"/>
-              </a:defRPr>
-            </a:lvl9pPr>
-          </a:lstStyle>
-          <a:p>
-            <a:pPr marL="0" indent="0" algn="ctr">
-              <a:buFont typeface="Arial"/>
-              <a:buNone/>
-              <a:defRPr/>
-            </a:pPr>
-            <a:r>
-              <a:rPr lang="ru-RU" dirty="0"/>
-              <a:t>Г</a:t>
-            </a:r>
-            <a:r>
-              <a:rPr lang="ru-RU" sz="2800" dirty="0"/>
-              <a:t>лавный экран</a:t>
-            </a:r>
-            <a:endParaRPr sz="2800" dirty="0"/>
           </a:p>
         </p:txBody>
       </p:sp>
@@ -8134,7 +8546,7 @@
           <p:cNvPr id="2" name="Номер слайда 1">
             <a:extLst>
               <a:ext uri="{FF2B5EF4-FFF2-40B4-BE49-F238E27FC236}">
-                <a16:creationId xmlns:a16="http://schemas.microsoft.com/office/drawing/2014/main" id="{28A6B49F-B607-68EC-A5DE-7A9BEAEC88A3}"/>
+                <a16:creationId xmlns:a16="http://schemas.microsoft.com/office/drawing/2014/main" id="{9F579886-6FFE-6A7D-210C-B31602326B32}"/>
               </a:ext>
             </a:extLst>
           </p:cNvPr>
@@ -8163,10 +8575,10 @@
       </p:sp>
       <p:pic>
         <p:nvPicPr>
-          <p:cNvPr id="3" name="Рисунок 2">
+          <p:cNvPr id="4" name="Рисунок 3">
             <a:extLst>
               <a:ext uri="{FF2B5EF4-FFF2-40B4-BE49-F238E27FC236}">
-                <a16:creationId xmlns:a16="http://schemas.microsoft.com/office/drawing/2014/main" id="{BE5546A0-606F-215E-13F4-B32B0D61828D}"/>
+                <a16:creationId xmlns:a16="http://schemas.microsoft.com/office/drawing/2014/main" id="{B3AA8CE4-6C1E-A565-EEF5-75CB66140786}"/>
               </a:ext>
             </a:extLst>
           </p:cNvPr>
@@ -8175,51 +8587,40 @@
           </p:cNvPicPr>
           <p:nvPr/>
         </p:nvPicPr>
-        <p:blipFill rotWithShape="1">
-          <a:blip r:embed="rId3" cstate="print">
+        <p:blipFill>
+          <a:blip r:embed="rId3">
             <a:extLst>
               <a:ext uri="{28A0092B-C50C-407E-A947-70E740481C1C}">
                 <a14:useLocalDpi xmlns:a14="http://schemas.microsoft.com/office/drawing/2010/main" val="0"/>
               </a:ext>
             </a:extLst>
           </a:blip>
-          <a:srcRect t="3130" b="5641"/>
+          <a:srcRect t="6523"/>
           <a:stretch>
             <a:fillRect/>
           </a:stretch>
         </p:blipFill>
-        <p:spPr bwMode="auto">
+        <p:spPr>
           <a:xfrm>
-            <a:off x="2431498" y="1611472"/>
-            <a:ext cx="2379345" cy="4824095"/>
+            <a:off x="421842" y="1400030"/>
+            <a:ext cx="10515600" cy="5321446"/>
           </a:xfrm>
           <a:prstGeom prst="rect">
             <a:avLst/>
           </a:prstGeom>
-          <a:noFill/>
-          <a:ln>
-            <a:noFill/>
-          </a:ln>
-          <a:extLst>
-            <a:ext uri="{53640926-AAD7-44D8-BBD7-CCE9431645EC}">
-              <a14:shadowObscured xmlns:a14="http://schemas.microsoft.com/office/drawing/2010/main"/>
-            </a:ext>
-          </a:extLst>
         </p:spPr>
       </p:pic>
     </p:spTree>
+    <p:extLst>
+      <p:ext uri="{BB962C8B-B14F-4D97-AF65-F5344CB8AC3E}">
+        <p14:creationId xmlns:p14="http://schemas.microsoft.com/office/powerpoint/2010/main" val="3860373786"/>
+      </p:ext>
+    </p:extLst>
   </p:cSld>
   <p:clrMapOvr>
     <a:masterClrMapping/>
   </p:clrMapOvr>
-  <mc:AlternateContent xmlns:mc="http://schemas.openxmlformats.org/markup-compatibility/2006" xmlns:p159="http://schemas.microsoft.com/office/powerpoint/2015/09/main">
-    <mc:Choice Requires="p159">
-      <p:transition/>
-    </mc:Choice>
-    <mc:Fallback xmlns:w="http://schemas.openxmlformats.org/wordprocessingml/2006/main" xmlns:m="http://schemas.openxmlformats.org/officeDocument/2006/math" xmlns="">
-      <p:transition advClick="1"/>
-    </mc:Fallback>
-  </mc:AlternateContent>
+  <p:transition/>
 </p:sld>
 </file>
 
